--- a/deck/ict-deck.pptx
+++ b/deck/ict-deck.pptx
@@ -3301,7 +3301,7 @@
                 <a:ea typeface="微软雅黑"/>
                 <a:cs typeface="微软雅黑"/>
               </a:rPr>
-              <a:t>政务公开语料 757,810 篇 · 本体三层已实现 · 换行业零改码（已实测）</a:t>
+              <a:t>政务公开语料 757,810 条 · 本体三层已实现 · 换行业零改码（已实测）</a:t>
             </a:r>
           </a:p>
         </p:txBody>
@@ -4646,7 +4646,7 @@
         <p:spPr>
           <a:xfrm>
             <a:off x="594360" y="1572768"/>
-            <a:ext cx="4400092" cy="512064"/>
+            <a:ext cx="4400092" cy="384048"/>
           </a:xfrm>
           <a:prstGeom prst="rect">
             <a:avLst/>
@@ -4675,7 +4675,7 @@
         <p:spPr>
           <a:xfrm>
             <a:off x="658368" y="1623060"/>
-            <a:ext cx="4272076" cy="411480"/>
+            <a:ext cx="4272076" cy="283464"/>
           </a:xfrm>
           <a:prstGeom prst="rect">
             <a:avLst/>
@@ -4712,7 +4712,7 @@
         <p:spPr>
           <a:xfrm>
             <a:off x="4994452" y="1572768"/>
-            <a:ext cx="2640055" cy="512064"/>
+            <a:ext cx="2640055" cy="384048"/>
           </a:xfrm>
           <a:prstGeom prst="rect">
             <a:avLst/>
@@ -4741,7 +4741,7 @@
         <p:spPr>
           <a:xfrm>
             <a:off x="5058460" y="1623060"/>
-            <a:ext cx="2512039" cy="411480"/>
+            <a:ext cx="2512039" cy="283464"/>
           </a:xfrm>
           <a:prstGeom prst="rect">
             <a:avLst/>
@@ -4778,7 +4778,7 @@
         <p:spPr>
           <a:xfrm>
             <a:off x="7634508" y="1572768"/>
-            <a:ext cx="3960083" cy="512064"/>
+            <a:ext cx="3960083" cy="384048"/>
           </a:xfrm>
           <a:prstGeom prst="rect">
             <a:avLst/>
@@ -4807,7 +4807,7 @@
         <p:spPr>
           <a:xfrm>
             <a:off x="7698516" y="1623060"/>
-            <a:ext cx="3832067" cy="411480"/>
+            <a:ext cx="3832067" cy="283464"/>
           </a:xfrm>
           <a:prstGeom prst="rect">
             <a:avLst/>
@@ -4843,8 +4843,8 @@
         </p:nvSpPr>
         <p:spPr>
           <a:xfrm>
-            <a:off x="594360" y="2084832"/>
-            <a:ext cx="4400092" cy="512064"/>
+            <a:off x="594360" y="1956816"/>
+            <a:ext cx="4400092" cy="384048"/>
           </a:xfrm>
           <a:prstGeom prst="rect">
             <a:avLst/>
@@ -4872,8 +4872,8 @@
         </p:nvSpPr>
         <p:spPr>
           <a:xfrm>
-            <a:off x="658368" y="2135124"/>
-            <a:ext cx="4272076" cy="411480"/>
+            <a:off x="658368" y="2007108"/>
+            <a:ext cx="4272076" cy="283464"/>
           </a:xfrm>
           <a:prstGeom prst="rect">
             <a:avLst/>
@@ -4909,8 +4909,8 @@
         </p:nvSpPr>
         <p:spPr>
           <a:xfrm>
-            <a:off x="4994452" y="2084832"/>
-            <a:ext cx="2640055" cy="512064"/>
+            <a:off x="4994452" y="1956816"/>
+            <a:ext cx="2640055" cy="384048"/>
           </a:xfrm>
           <a:prstGeom prst="rect">
             <a:avLst/>
@@ -4938,8 +4938,8 @@
         </p:nvSpPr>
         <p:spPr>
           <a:xfrm>
-            <a:off x="5058460" y="2135124"/>
-            <a:ext cx="2512039" cy="411480"/>
+            <a:off x="5058460" y="2007108"/>
+            <a:ext cx="2512039" cy="283464"/>
           </a:xfrm>
           <a:prstGeom prst="rect">
             <a:avLst/>
@@ -4975,8 +4975,8 @@
         </p:nvSpPr>
         <p:spPr>
           <a:xfrm>
-            <a:off x="7634508" y="2084832"/>
-            <a:ext cx="3960083" cy="512064"/>
+            <a:off x="7634508" y="1956816"/>
+            <a:ext cx="3960083" cy="384048"/>
           </a:xfrm>
           <a:prstGeom prst="rect">
             <a:avLst/>
@@ -5004,8 +5004,8 @@
         </p:nvSpPr>
         <p:spPr>
           <a:xfrm>
-            <a:off x="7698516" y="2135124"/>
-            <a:ext cx="3832067" cy="411480"/>
+            <a:off x="7698516" y="2007108"/>
+            <a:ext cx="3832067" cy="283464"/>
           </a:xfrm>
           <a:prstGeom prst="rect">
             <a:avLst/>
@@ -5041,8 +5041,8 @@
         </p:nvSpPr>
         <p:spPr>
           <a:xfrm>
-            <a:off x="658368" y="2647188"/>
-            <a:ext cx="4272076" cy="411480"/>
+            <a:off x="658368" y="2391156"/>
+            <a:ext cx="4272076" cy="283464"/>
           </a:xfrm>
           <a:prstGeom prst="rect">
             <a:avLst/>
@@ -5078,8 +5078,8 @@
         </p:nvSpPr>
         <p:spPr>
           <a:xfrm>
-            <a:off x="5058460" y="2647188"/>
-            <a:ext cx="2512039" cy="411480"/>
+            <a:off x="5058460" y="2391156"/>
+            <a:ext cx="2512039" cy="283464"/>
           </a:xfrm>
           <a:prstGeom prst="rect">
             <a:avLst/>
@@ -5115,8 +5115,8 @@
         </p:nvSpPr>
         <p:spPr>
           <a:xfrm>
-            <a:off x="7698516" y="2647188"/>
-            <a:ext cx="3832067" cy="411480"/>
+            <a:off x="7698516" y="2391156"/>
+            <a:ext cx="3832067" cy="283464"/>
           </a:xfrm>
           <a:prstGeom prst="rect">
             <a:avLst/>
@@ -5152,8 +5152,8 @@
         </p:nvSpPr>
         <p:spPr>
           <a:xfrm>
-            <a:off x="594360" y="3108960"/>
-            <a:ext cx="4400092" cy="512064"/>
+            <a:off x="594360" y="2724912"/>
+            <a:ext cx="4400092" cy="384048"/>
           </a:xfrm>
           <a:prstGeom prst="rect">
             <a:avLst/>
@@ -5181,8 +5181,8 @@
         </p:nvSpPr>
         <p:spPr>
           <a:xfrm>
-            <a:off x="658368" y="3159252"/>
-            <a:ext cx="4272076" cy="411480"/>
+            <a:off x="658368" y="2775204"/>
+            <a:ext cx="4272076" cy="283464"/>
           </a:xfrm>
           <a:prstGeom prst="rect">
             <a:avLst/>
@@ -5218,8 +5218,8 @@
         </p:nvSpPr>
         <p:spPr>
           <a:xfrm>
-            <a:off x="4994452" y="3108960"/>
-            <a:ext cx="2640055" cy="512064"/>
+            <a:off x="4994452" y="2724912"/>
+            <a:ext cx="2640055" cy="384048"/>
           </a:xfrm>
           <a:prstGeom prst="rect">
             <a:avLst/>
@@ -5247,8 +5247,8 @@
         </p:nvSpPr>
         <p:spPr>
           <a:xfrm>
-            <a:off x="5058460" y="3159252"/>
-            <a:ext cx="2512039" cy="411480"/>
+            <a:off x="5058460" y="2775204"/>
+            <a:ext cx="2512039" cy="283464"/>
           </a:xfrm>
           <a:prstGeom prst="rect">
             <a:avLst/>
@@ -5284,8 +5284,8 @@
         </p:nvSpPr>
         <p:spPr>
           <a:xfrm>
-            <a:off x="7634508" y="3108960"/>
-            <a:ext cx="3960083" cy="512064"/>
+            <a:off x="7634508" y="2724912"/>
+            <a:ext cx="3960083" cy="384048"/>
           </a:xfrm>
           <a:prstGeom prst="rect">
             <a:avLst/>
@@ -5313,119 +5313,119 @@
         </p:nvSpPr>
         <p:spPr>
           <a:xfrm>
+            <a:off x="7698516" y="2775204"/>
+            <a:ext cx="3832067" cy="283464"/>
+          </a:xfrm>
+          <a:prstGeom prst="rect">
+            <a:avLst/>
+          </a:prstGeom>
+          <a:noFill/>
+        </p:spPr>
+        <p:txBody>
+          <a:bodyPr wrap="square">
+            <a:spAutoFit/>
+          </a:bodyPr>
+          <a:lstStyle/>
+          <a:p>
+            <a:pPr algn="l"/>
+            <a:r>
+              <a:rPr sz="1050" b="0">
+                <a:solidFill>
+                  <a:srgbClr val="0A1E3D"/>
+                </a:solidFill>
+                <a:latin typeface="微软雅黑"/>
+                <a:ea typeface="微软雅黑"/>
+                <a:cs typeface="微软雅黑"/>
+              </a:rPr>
+              <a:t>ontology/{build,align,prune}.py --self-test</a:t>
+            </a:r>
+          </a:p>
+        </p:txBody>
+      </p:sp>
+      <p:sp>
+        <p:nvSpPr>
+          <p:cNvPr id="26" name="TextBox 25"/>
+          <p:cNvSpPr txBox="1"/>
+          <p:nvPr/>
+        </p:nvSpPr>
+        <p:spPr>
+          <a:xfrm>
+            <a:off x="658368" y="3159252"/>
+            <a:ext cx="4272076" cy="283464"/>
+          </a:xfrm>
+          <a:prstGeom prst="rect">
+            <a:avLst/>
+          </a:prstGeom>
+          <a:noFill/>
+        </p:spPr>
+        <p:txBody>
+          <a:bodyPr wrap="square">
+            <a:spAutoFit/>
+          </a:bodyPr>
+          <a:lstStyle/>
+          <a:p>
+            <a:pPr algn="l"/>
+            <a:r>
+              <a:rPr sz="1050" b="0">
+                <a:solidFill>
+                  <a:srgbClr val="0A1E3D"/>
+                </a:solidFill>
+                <a:latin typeface="微软雅黑"/>
+                <a:ea typeface="微软雅黑"/>
+                <a:cs typeface="微软雅黑"/>
+              </a:rPr>
+              <a:t>语料链自测</a:t>
+            </a:r>
+          </a:p>
+        </p:txBody>
+      </p:sp>
+      <p:sp>
+        <p:nvSpPr>
+          <p:cNvPr id="27" name="TextBox 26"/>
+          <p:cNvSpPr txBox="1"/>
+          <p:nvPr/>
+        </p:nvSpPr>
+        <p:spPr>
+          <a:xfrm>
+            <a:off x="5058460" y="3159252"/>
+            <a:ext cx="2512039" cy="283464"/>
+          </a:xfrm>
+          <a:prstGeom prst="rect">
+            <a:avLst/>
+          </a:prstGeom>
+          <a:noFill/>
+        </p:spPr>
+        <p:txBody>
+          <a:bodyPr wrap="square">
+            <a:spAutoFit/>
+          </a:bodyPr>
+          <a:lstStyle/>
+          <a:p>
+            <a:pPr algn="l"/>
+            <a:r>
+              <a:rPr sz="1050" b="0">
+                <a:solidFill>
+                  <a:srgbClr val="0A1E3D"/>
+                </a:solidFill>
+                <a:latin typeface="微软雅黑"/>
+                <a:ea typeface="微软雅黑"/>
+                <a:cs typeface="微软雅黑"/>
+              </a:rPr>
+              <a:t>5/5 · 5/5 · 5/5 · 3/3</a:t>
+            </a:r>
+          </a:p>
+        </p:txBody>
+      </p:sp>
+      <p:sp>
+        <p:nvSpPr>
+          <p:cNvPr id="28" name="TextBox 27"/>
+          <p:cNvSpPr txBox="1"/>
+          <p:nvPr/>
+        </p:nvSpPr>
+        <p:spPr>
+          <a:xfrm>
             <a:off x="7698516" y="3159252"/>
-            <a:ext cx="3832067" cy="411480"/>
-          </a:xfrm>
-          <a:prstGeom prst="rect">
-            <a:avLst/>
-          </a:prstGeom>
-          <a:noFill/>
-        </p:spPr>
-        <p:txBody>
-          <a:bodyPr wrap="square">
-            <a:spAutoFit/>
-          </a:bodyPr>
-          <a:lstStyle/>
-          <a:p>
-            <a:pPr algn="l"/>
-            <a:r>
-              <a:rPr sz="1050" b="0">
-                <a:solidFill>
-                  <a:srgbClr val="0A1E3D"/>
-                </a:solidFill>
-                <a:latin typeface="微软雅黑"/>
-                <a:ea typeface="微软雅黑"/>
-                <a:cs typeface="微软雅黑"/>
-              </a:rPr>
-              <a:t>ontology/{build,align,prune}.py --self-test</a:t>
-            </a:r>
-          </a:p>
-        </p:txBody>
-      </p:sp>
-      <p:sp>
-        <p:nvSpPr>
-          <p:cNvPr id="26" name="TextBox 25"/>
-          <p:cNvSpPr txBox="1"/>
-          <p:nvPr/>
-        </p:nvSpPr>
-        <p:spPr>
-          <a:xfrm>
-            <a:off x="658368" y="3671316"/>
-            <a:ext cx="4272076" cy="411480"/>
-          </a:xfrm>
-          <a:prstGeom prst="rect">
-            <a:avLst/>
-          </a:prstGeom>
-          <a:noFill/>
-        </p:spPr>
-        <p:txBody>
-          <a:bodyPr wrap="square">
-            <a:spAutoFit/>
-          </a:bodyPr>
-          <a:lstStyle/>
-          <a:p>
-            <a:pPr algn="l"/>
-            <a:r>
-              <a:rPr sz="1050" b="0">
-                <a:solidFill>
-                  <a:srgbClr val="0A1E3D"/>
-                </a:solidFill>
-                <a:latin typeface="微软雅黑"/>
-                <a:ea typeface="微软雅黑"/>
-                <a:cs typeface="微软雅黑"/>
-              </a:rPr>
-              <a:t>语料链自测</a:t>
-            </a:r>
-          </a:p>
-        </p:txBody>
-      </p:sp>
-      <p:sp>
-        <p:nvSpPr>
-          <p:cNvPr id="27" name="TextBox 26"/>
-          <p:cNvSpPr txBox="1"/>
-          <p:nvPr/>
-        </p:nvSpPr>
-        <p:spPr>
-          <a:xfrm>
-            <a:off x="5058460" y="3671316"/>
-            <a:ext cx="2512039" cy="411480"/>
-          </a:xfrm>
-          <a:prstGeom prst="rect">
-            <a:avLst/>
-          </a:prstGeom>
-          <a:noFill/>
-        </p:spPr>
-        <p:txBody>
-          <a:bodyPr wrap="square">
-            <a:spAutoFit/>
-          </a:bodyPr>
-          <a:lstStyle/>
-          <a:p>
-            <a:pPr algn="l"/>
-            <a:r>
-              <a:rPr sz="1050" b="0">
-                <a:solidFill>
-                  <a:srgbClr val="0A1E3D"/>
-                </a:solidFill>
-                <a:latin typeface="微软雅黑"/>
-                <a:ea typeface="微软雅黑"/>
-                <a:cs typeface="微软雅黑"/>
-              </a:rPr>
-              <a:t>5/5 · 5/5 · 5/5 · 3/3</a:t>
-            </a:r>
-          </a:p>
-        </p:txBody>
-      </p:sp>
-      <p:sp>
-        <p:nvSpPr>
-          <p:cNvPr id="28" name="TextBox 27"/>
-          <p:cNvSpPr txBox="1"/>
-          <p:nvPr/>
-        </p:nvSpPr>
-        <p:spPr>
-          <a:xfrm>
-            <a:off x="7698516" y="3671316"/>
-            <a:ext cx="3832067" cy="411480"/>
+            <a:ext cx="3832067" cy="283464"/>
           </a:xfrm>
           <a:prstGeom prst="rect">
             <a:avLst/>
@@ -5461,8 +5461,8 @@
         </p:nvSpPr>
         <p:spPr>
           <a:xfrm>
-            <a:off x="594360" y="4133088"/>
-            <a:ext cx="4400092" cy="512064"/>
+            <a:off x="594360" y="3493008"/>
+            <a:ext cx="4400092" cy="384048"/>
           </a:xfrm>
           <a:prstGeom prst="rect">
             <a:avLst/>
@@ -5490,8 +5490,8 @@
         </p:nvSpPr>
         <p:spPr>
           <a:xfrm>
-            <a:off x="658368" y="4183380"/>
-            <a:ext cx="4272076" cy="411480"/>
+            <a:off x="658368" y="3543300"/>
+            <a:ext cx="4272076" cy="283464"/>
           </a:xfrm>
           <a:prstGeom prst="rect">
             <a:avLst/>
@@ -5514,7 +5514,7 @@
                 <a:ea typeface="微软雅黑"/>
                 <a:cs typeface="微软雅黑"/>
               </a:rPr>
-              <a:t>全包完整性</a:t>
+              <a:t>检索效果评测</a:t>
             </a:r>
           </a:p>
         </p:txBody>
@@ -5527,8 +5527,8 @@
         </p:nvSpPr>
         <p:spPr>
           <a:xfrm>
-            <a:off x="4994452" y="4133088"/>
-            <a:ext cx="2640055" cy="512064"/>
+            <a:off x="4994452" y="3493008"/>
+            <a:ext cx="2640055" cy="384048"/>
           </a:xfrm>
           <a:prstGeom prst="rect">
             <a:avLst/>
@@ -5556,8 +5556,8 @@
         </p:nvSpPr>
         <p:spPr>
           <a:xfrm>
-            <a:off x="5058460" y="4183380"/>
-            <a:ext cx="2512039" cy="411480"/>
+            <a:off x="5058460" y="3543300"/>
+            <a:ext cx="2512039" cy="283464"/>
           </a:xfrm>
           <a:prstGeom prst="rect">
             <a:avLst/>
@@ -5580,7 +5580,7 @@
                 <a:ea typeface="微软雅黑"/>
                 <a:cs typeface="微软雅黑"/>
               </a:rPr>
-              <a:t>87 个文件全 OK</a:t>
+              <a:t>政务 10/10 · RFC 15/15</a:t>
             </a:r>
           </a:p>
         </p:txBody>
@@ -5593,8 +5593,8 @@
         </p:nvSpPr>
         <p:spPr>
           <a:xfrm>
-            <a:off x="7634508" y="4133088"/>
-            <a:ext cx="3960083" cy="512064"/>
+            <a:off x="7634508" y="3493008"/>
+            <a:ext cx="3960083" cy="384048"/>
           </a:xfrm>
           <a:prstGeom prst="rect">
             <a:avLst/>
@@ -5622,8 +5622,8 @@
         </p:nvSpPr>
         <p:spPr>
           <a:xfrm>
-            <a:off x="7698516" y="4183380"/>
-            <a:ext cx="3832067" cy="411480"/>
+            <a:off x="7698516" y="3543300"/>
+            <a:ext cx="3832067" cy="283464"/>
           </a:xfrm>
           <a:prstGeom prst="rect">
             <a:avLst/>
@@ -5646,6 +5646,315 @@
                 <a:ea typeface="微软雅黑"/>
                 <a:cs typeface="微软雅黑"/>
               </a:rPr>
+              <a:t>tools/eval-retrieval.py --domain gov|rfc</a:t>
+            </a:r>
+          </a:p>
+        </p:txBody>
+      </p:sp>
+      <p:sp>
+        <p:nvSpPr>
+          <p:cNvPr id="35" name="TextBox 34"/>
+          <p:cNvSpPr txBox="1"/>
+          <p:nvPr/>
+        </p:nvSpPr>
+        <p:spPr>
+          <a:xfrm>
+            <a:off x="658368" y="3927348"/>
+            <a:ext cx="4272076" cy="283464"/>
+          </a:xfrm>
+          <a:prstGeom prst="rect">
+            <a:avLst/>
+          </a:prstGeom>
+          <a:noFill/>
+        </p:spPr>
+        <p:txBody>
+          <a:bodyPr wrap="square">
+            <a:spAutoFit/>
+          </a:bodyPr>
+          <a:lstStyle/>
+          <a:p>
+            <a:pPr algn="l"/>
+            <a:r>
+              <a:rPr sz="1050" b="0">
+                <a:solidFill>
+                  <a:srgbClr val="0A1E3D"/>
+                </a:solidFill>
+                <a:latin typeface="微软雅黑"/>
+                <a:ea typeface="微软雅黑"/>
+                <a:cs typeface="微软雅黑"/>
+              </a:rPr>
+              <a:t>引用回查 MCP</a:t>
+            </a:r>
+          </a:p>
+        </p:txBody>
+      </p:sp>
+      <p:sp>
+        <p:nvSpPr>
+          <p:cNvPr id="36" name="TextBox 35"/>
+          <p:cNvSpPr txBox="1"/>
+          <p:nvPr/>
+        </p:nvSpPr>
+        <p:spPr>
+          <a:xfrm>
+            <a:off x="5058460" y="3927348"/>
+            <a:ext cx="2512039" cy="283464"/>
+          </a:xfrm>
+          <a:prstGeom prst="rect">
+            <a:avLst/>
+          </a:prstGeom>
+          <a:noFill/>
+        </p:spPr>
+        <p:txBody>
+          <a:bodyPr wrap="square">
+            <a:spAutoFit/>
+          </a:bodyPr>
+          <a:lstStyle/>
+          <a:p>
+            <a:pPr algn="l"/>
+            <a:r>
+              <a:rPr sz="1050" b="0">
+                <a:solidFill>
+                  <a:srgbClr val="0A1E3D"/>
+                </a:solidFill>
+                <a:latin typeface="微软雅黑"/>
+                <a:ea typeface="微软雅黑"/>
+                <a:cs typeface="微软雅黑"/>
+              </a:rPr>
+              <a:t>96 条判据全过</a:t>
+            </a:r>
+          </a:p>
+        </p:txBody>
+      </p:sp>
+      <p:sp>
+        <p:nvSpPr>
+          <p:cNvPr id="37" name="TextBox 36"/>
+          <p:cNvSpPr txBox="1"/>
+          <p:nvPr/>
+        </p:nvSpPr>
+        <p:spPr>
+          <a:xfrm>
+            <a:off x="7698516" y="3927348"/>
+            <a:ext cx="3832067" cy="283464"/>
+          </a:xfrm>
+          <a:prstGeom prst="rect">
+            <a:avLst/>
+          </a:prstGeom>
+          <a:noFill/>
+        </p:spPr>
+        <p:txBody>
+          <a:bodyPr wrap="square">
+            <a:spAutoFit/>
+          </a:bodyPr>
+          <a:lstStyle/>
+          <a:p>
+            <a:pPr algn="l"/>
+            <a:r>
+              <a:rPr sz="1050" b="0">
+                <a:solidFill>
+                  <a:srgbClr val="0A1E3D"/>
+                </a:solidFill>
+                <a:latin typeface="微软雅黑"/>
+                <a:ea typeface="微软雅黑"/>
+                <a:cs typeface="微软雅黑"/>
+              </a:rPr>
+              <a:t>track2-mcp/tests/（见复核命令 X 段）</a:t>
+            </a:r>
+          </a:p>
+        </p:txBody>
+      </p:sp>
+      <p:sp>
+        <p:nvSpPr>
+          <p:cNvPr id="38" name="Rectangle 37"/>
+          <p:cNvSpPr/>
+          <p:nvPr/>
+        </p:nvSpPr>
+        <p:spPr>
+          <a:xfrm>
+            <a:off x="594360" y="4261104"/>
+            <a:ext cx="4400092" cy="384048"/>
+          </a:xfrm>
+          <a:prstGeom prst="rect">
+            <a:avLst/>
+          </a:prstGeom>
+          <a:solidFill>
+            <a:srgbClr val="F0F4F8"/>
+          </a:solidFill>
+          <a:ln>
+            <a:noFill/>
+          </a:ln>
+        </p:spPr>
+        <p:txBody>
+          <a:bodyPr rtlCol="0" anchor="ctr"/>
+          <a:lstStyle/>
+          <a:p>
+            <a:pPr algn="ctr"/>
+          </a:p>
+        </p:txBody>
+      </p:sp>
+      <p:sp>
+        <p:nvSpPr>
+          <p:cNvPr id="39" name="TextBox 38"/>
+          <p:cNvSpPr txBox="1"/>
+          <p:nvPr/>
+        </p:nvSpPr>
+        <p:spPr>
+          <a:xfrm>
+            <a:off x="658368" y="4311396"/>
+            <a:ext cx="4272076" cy="283464"/>
+          </a:xfrm>
+          <a:prstGeom prst="rect">
+            <a:avLst/>
+          </a:prstGeom>
+          <a:noFill/>
+        </p:spPr>
+        <p:txBody>
+          <a:bodyPr wrap="square">
+            <a:spAutoFit/>
+          </a:bodyPr>
+          <a:lstStyle/>
+          <a:p>
+            <a:pPr algn="l"/>
+            <a:r>
+              <a:rPr sz="1050" b="0">
+                <a:solidFill>
+                  <a:srgbClr val="0A1E3D"/>
+                </a:solidFill>
+                <a:latin typeface="微软雅黑"/>
+                <a:ea typeface="微软雅黑"/>
+                <a:cs typeface="微软雅黑"/>
+              </a:rPr>
+              <a:t>全包完整性</a:t>
+            </a:r>
+          </a:p>
+        </p:txBody>
+      </p:sp>
+      <p:sp>
+        <p:nvSpPr>
+          <p:cNvPr id="40" name="Rectangle 39"/>
+          <p:cNvSpPr/>
+          <p:nvPr/>
+        </p:nvSpPr>
+        <p:spPr>
+          <a:xfrm>
+            <a:off x="4994452" y="4261104"/>
+            <a:ext cx="2640055" cy="384048"/>
+          </a:xfrm>
+          <a:prstGeom prst="rect">
+            <a:avLst/>
+          </a:prstGeom>
+          <a:solidFill>
+            <a:srgbClr val="F0F4F8"/>
+          </a:solidFill>
+          <a:ln>
+            <a:noFill/>
+          </a:ln>
+        </p:spPr>
+        <p:txBody>
+          <a:bodyPr rtlCol="0" anchor="ctr"/>
+          <a:lstStyle/>
+          <a:p>
+            <a:pPr algn="ctr"/>
+          </a:p>
+        </p:txBody>
+      </p:sp>
+      <p:sp>
+        <p:nvSpPr>
+          <p:cNvPr id="41" name="TextBox 40"/>
+          <p:cNvSpPr txBox="1"/>
+          <p:nvPr/>
+        </p:nvSpPr>
+        <p:spPr>
+          <a:xfrm>
+            <a:off x="5058460" y="4311396"/>
+            <a:ext cx="2512039" cy="283464"/>
+          </a:xfrm>
+          <a:prstGeom prst="rect">
+            <a:avLst/>
+          </a:prstGeom>
+          <a:noFill/>
+        </p:spPr>
+        <p:txBody>
+          <a:bodyPr wrap="square">
+            <a:spAutoFit/>
+          </a:bodyPr>
+          <a:lstStyle/>
+          <a:p>
+            <a:pPr algn="l"/>
+            <a:r>
+              <a:rPr sz="1050" b="0">
+                <a:solidFill>
+                  <a:srgbClr val="0A1E3D"/>
+                </a:solidFill>
+                <a:latin typeface="微软雅黑"/>
+                <a:ea typeface="微软雅黑"/>
+                <a:cs typeface="微软雅黑"/>
+              </a:rPr>
+              <a:t>全部 OK（可逐条复跑）</a:t>
+            </a:r>
+          </a:p>
+        </p:txBody>
+      </p:sp>
+      <p:sp>
+        <p:nvSpPr>
+          <p:cNvPr id="42" name="Rectangle 41"/>
+          <p:cNvSpPr/>
+          <p:nvPr/>
+        </p:nvSpPr>
+        <p:spPr>
+          <a:xfrm>
+            <a:off x="7634508" y="4261104"/>
+            <a:ext cx="3960083" cy="384048"/>
+          </a:xfrm>
+          <a:prstGeom prst="rect">
+            <a:avLst/>
+          </a:prstGeom>
+          <a:solidFill>
+            <a:srgbClr val="F0F4F8"/>
+          </a:solidFill>
+          <a:ln>
+            <a:noFill/>
+          </a:ln>
+        </p:spPr>
+        <p:txBody>
+          <a:bodyPr rtlCol="0" anchor="ctr"/>
+          <a:lstStyle/>
+          <a:p>
+            <a:pPr algn="ctr"/>
+          </a:p>
+        </p:txBody>
+      </p:sp>
+      <p:sp>
+        <p:nvSpPr>
+          <p:cNvPr id="43" name="TextBox 42"/>
+          <p:cNvSpPr txBox="1"/>
+          <p:nvPr/>
+        </p:nvSpPr>
+        <p:spPr>
+          <a:xfrm>
+            <a:off x="7698516" y="4311396"/>
+            <a:ext cx="3832067" cy="283464"/>
+          </a:xfrm>
+          <a:prstGeom prst="rect">
+            <a:avLst/>
+          </a:prstGeom>
+          <a:noFill/>
+        </p:spPr>
+        <p:txBody>
+          <a:bodyPr wrap="square">
+            <a:spAutoFit/>
+          </a:bodyPr>
+          <a:lstStyle/>
+          <a:p>
+            <a:pPr algn="l"/>
+            <a:r>
+              <a:rPr sz="1050" b="0">
+                <a:solidFill>
+                  <a:srgbClr val="0A1E3D"/>
+                </a:solidFill>
+                <a:latin typeface="微软雅黑"/>
+                <a:ea typeface="微软雅黑"/>
+                <a:cs typeface="微软雅黑"/>
+              </a:rPr>
               <a:t>sha256sum -c MANIFEST.sha256</a:t>
             </a:r>
           </a:p>
@@ -5653,7 +5962,7 @@
       </p:sp>
       <p:sp>
         <p:nvSpPr>
-          <p:cNvPr id="35" name="TextBox 34"/>
+          <p:cNvPr id="44" name="TextBox 43"/>
           <p:cNvSpPr txBox="1"/>
           <p:nvPr/>
         </p:nvSpPr>
@@ -5683,14 +5992,14 @@
                 <a:ea typeface="微软雅黑"/>
                 <a:cs typeface="微软雅黑"/>
               </a:rPr>
-              <a:t>复核命令.md 的 A–W 段给出每条结论对应的单条命令与预期输出，评审可逐条验证。</a:t>
-            </a:r>
-          </a:p>
-        </p:txBody>
-      </p:sp>
-      <p:sp>
-        <p:nvSpPr>
-          <p:cNvPr id="36" name="TextBox 35"/>
+              <a:t>复核命令.md 的 A–Y 段给出每条结论对应的单条命令与预期输出，评审可逐条验证。</a:t>
+            </a:r>
+          </a:p>
+        </p:txBody>
+      </p:sp>
+      <p:sp>
+        <p:nvSpPr>
+          <p:cNvPr id="45" name="TextBox 44"/>
           <p:cNvSpPr txBox="1"/>
           <p:nvPr/>
         </p:nvSpPr>
@@ -6171,7 +6480,7 @@
                 <a:ea typeface="微软雅黑"/>
                 <a:cs typeface="微软雅黑"/>
               </a:rPr>
-              <a:t>判定层用的是自备网关的外部模型，换模型结论可能变；人工闸门之后 0 条入库</a:t>
+              <a:t>判定层用的是自备网关的外部模型，换模型结论可能变；强证据层 21,036 条自动入库，候选层 226,710 条零人工确认</a:t>
             </a:r>
           </a:p>
         </p:txBody>
@@ -6237,7 +6546,7 @@
                 <a:ea typeface="微软雅黑"/>
                 <a:cs typeface="微软雅黑"/>
               </a:rPr>
-              <a:t>GPU 化（44 倍）仅在独立环境实测，尚未落到正在跑的 embedding 服务</a:t>
+              <a:t>GPU 已落地到现役 embedding 服务（端到端 387 条/秒 = 26.9×；纯推理 635 条/秒 = 44×），但显存压力与多并发行为未测</a:t>
             </a:r>
           </a:p>
         </p:txBody>
@@ -6369,7 +6678,7 @@
                 <a:ea typeface="微软雅黑"/>
                 <a:cs typeface="微软雅黑"/>
               </a:rPr>
-              <a:t>知识库全量导入不可行（1,864,451 块 ≈ 27 天），采用 15,000 块分层子集策略</a:t>
+              <a:t>知识库全量导入按 batch 200 实测约 15.8 小时（1,864,451 块），但要占满写入窗口，故采用 15,494 块分层子集策略</a:t>
             </a:r>
           </a:p>
         </p:txBody>
@@ -6435,7 +6744,7 @@
                 <a:ea typeface="微软雅黑"/>
                 <a:cs typeface="微软雅黑"/>
               </a:rPr>
-              <a:t>下一步：知识库扩容至 15,000 块子集 → GPU 化落地 → 人工确认闸门入库 → 第二行业真实语料迁移。</a:t>
+              <a:t>下一步：知识库定全量筛选策略（15,494 块子集已入库）→ 人工确认闸门入库 → 第二行业真实语料迁移。</a:t>
             </a:r>
           </a:p>
         </p:txBody>
@@ -6667,7 +6976,7 @@
                 <a:ea typeface="微软雅黑"/>
                 <a:cs typeface="微软雅黑"/>
               </a:rPr>
-              <a:t>篇政务公开文件</a:t>
+              <a:t>条政务公开记录</a:t>
             </a:r>
           </a:p>
         </p:txBody>
@@ -10392,7 +10701,7 @@
                 <a:ea typeface="微软雅黑"/>
                 <a:cs typeface="微软雅黑"/>
               </a:rPr>
-              <a:t>255,451 条三元组
+              <a:t>247,746 条三元组
 出处失败 0</a:t>
             </a:r>
           </a:p>
@@ -10592,8 +10901,8 @@
                 <a:ea typeface="微软雅黑"/>
                 <a:cs typeface="微软雅黑"/>
               </a:rPr>
-              <a:t>14,035 节点 / 148,005 边
-闭包 171,552 对</a:t>
+              <a:t>强证据层 2,855 节点 / 7,085 边
+（含候选层 14,035 / 148,005）</a:t>
             </a:r>
           </a:p>
         </p:txBody>
@@ -10959,7 +11268,7 @@
                 <a:ea typeface="微软雅黑"/>
                 <a:cs typeface="微软雅黑"/>
               </a:rPr>
-              <a:t>60,000 块语料 → 25.5 万条三元组 → 引用图</a:t>
+              <a:t>60,000 块语料 → 24.8 万条三元组 → 引用图</a:t>
             </a:r>
           </a:p>
         </p:txBody>
@@ -11025,7 +11334,7 @@
                 <a:ea typeface="微软雅黑"/>
                 <a:cs typeface="微软雅黑"/>
               </a:rPr>
-              <a:t>255,451</a:t>
+              <a:t>247,746</a:t>
             </a:r>
           </a:p>
         </p:txBody>
@@ -11099,7 +11408,7 @@
                 <a:ea typeface="微软雅黑"/>
                 <a:cs typeface="微软雅黑"/>
               </a:rPr>
-              <a:t>来自 60,000 块政务语料</a:t>
+              <a:t>来自 60,000 块政务语料 · 强证据层 2.1 万条可自动入库</a:t>
             </a:r>
           </a:p>
         </p:txBody>
@@ -11136,7 +11445,7 @@
                 <a:ea typeface="微软雅黑"/>
                 <a:cs typeface="微软雅黑"/>
               </a:rPr>
-              <a:t>127,766</a:t>
+              <a:t>132,883</a:t>
             </a:r>
           </a:p>
         </p:txBody>
@@ -11210,7 +11519,7 @@
                 <a:ea typeface="微软雅黑"/>
                 <a:cs typeface="微软雅黑"/>
               </a:rPr>
-              <a:t>Document 105,182 / Organization 22,521 等 4 类</a:t>
+              <a:t>Document 121,100 / Organization 11,652 等 5 类</a:t>
             </a:r>
           </a:p>
         </p:txBody>
@@ -11247,7 +11556,7 @@
                 <a:ea typeface="微软雅黑"/>
                 <a:cs typeface="微软雅黑"/>
               </a:rPr>
-              <a:t>148,005</a:t>
+              <a:t>7,085</a:t>
             </a:r>
           </a:p>
         </p:txBody>
@@ -11284,7 +11593,7 @@
                 <a:ea typeface="微软雅黑"/>
                 <a:cs typeface="微软雅黑"/>
               </a:rPr>
-              <a:t>条引用边 / 14,035 节点</a:t>
+              <a:t>条引用边 / 2,855 节点</a:t>
             </a:r>
           </a:p>
         </p:txBody>
@@ -11321,7 +11630,7 @@
                 <a:ea typeface="微软雅黑"/>
                 <a:cs typeface="微软雅黑"/>
               </a:rPr>
-              <a:t>闭包 171,552 对，计算 3.8 秒</a:t>
+              <a:t>强证据层；含候选层时 148,005 边</a:t>
             </a:r>
           </a:p>
         </p:txBody>
@@ -11358,7 +11667,7 @@
                 <a:ea typeface="微软雅黑"/>
                 <a:cs typeface="微软雅黑"/>
               </a:rPr>
-              <a:t>谓词分布（前 5）</a:t>
+              <a:t>谓词分布（前 5 / 共 8 类，全量口径）</a:t>
             </a:r>
           </a:p>
         </p:txBody>
@@ -11372,9 +11681,9 @@
         <p:grpSpPr>
           <a:xfrm>
             <a:off x="777240" y="4133087"/>
-            <a:ext cx="5650992" cy="2130553"/>
+            <a:ext cx="4965192" cy="2130553"/>
             <a:chOff x="777240" y="4133087"/>
-            <a:chExt cx="5650992" cy="2130553"/>
+            <a:chExt cx="4965192" cy="2130553"/>
           </a:xfrm>
         </p:grpSpPr>
         <p:sp>
@@ -11386,7 +11695,7 @@
           <p:spPr>
             <a:xfrm>
               <a:off x="1600200" y="4160520"/>
-              <a:ext cx="4206240" cy="274320"/>
+              <a:ext cx="3520440" cy="274320"/>
             </a:xfrm>
             <a:prstGeom prst="roundRect">
               <a:avLst/>
@@ -11415,7 +11724,7 @@
           <p:spPr>
             <a:xfrm>
               <a:off x="1600200" y="4160520"/>
-              <a:ext cx="4206240" cy="274320"/>
+              <a:ext cx="3520440" cy="274320"/>
             </a:xfrm>
             <a:prstGeom prst="roundRect">
               <a:avLst/>
@@ -11480,7 +11789,7 @@
           </p:nvSpPr>
           <p:spPr>
             <a:xfrm>
-              <a:off x="5879592" y="4133087"/>
+              <a:off x="5193792" y="4133087"/>
               <a:ext cx="548640" cy="274320"/>
             </a:xfrm>
             <a:prstGeom prst="rect">
@@ -11517,7 +11826,7 @@
           <p:spPr>
             <a:xfrm>
               <a:off x="1600200" y="4617720"/>
-              <a:ext cx="4206240" cy="274320"/>
+              <a:ext cx="3520440" cy="274320"/>
             </a:xfrm>
             <a:prstGeom prst="roundRect">
               <a:avLst/>
@@ -11546,7 +11855,7 @@
           <p:spPr>
             <a:xfrm>
               <a:off x="1600200" y="4617720"/>
-              <a:ext cx="1008865" cy="274320"/>
+              <a:ext cx="554655" cy="274320"/>
             </a:xfrm>
             <a:prstGeom prst="roundRect">
               <a:avLst/>
@@ -11611,7 +11920,7 @@
           </p:nvSpPr>
           <p:spPr>
             <a:xfrm>
-              <a:off x="5879592" y="4590288"/>
+              <a:off x="5193792" y="4590288"/>
               <a:ext cx="548640" cy="274320"/>
             </a:xfrm>
             <a:prstGeom prst="rect">
@@ -11634,7 +11943,7 @@
                   <a:ea typeface="微软雅黑"/>
                   <a:cs typeface="微软雅黑"/>
                 </a:rPr>
-                <a:t>42,717</a:t>
+                <a:t>28,060</a:t>
               </a:r>
             </a:p>
           </p:txBody>
@@ -11648,7 +11957,7 @@
           <p:spPr>
             <a:xfrm>
               <a:off x="1600200" y="5074920"/>
-              <a:ext cx="4206240" cy="274320"/>
+              <a:ext cx="3520440" cy="274320"/>
             </a:xfrm>
             <a:prstGeom prst="roundRect">
               <a:avLst/>
@@ -11677,7 +11986,7 @@
           <p:spPr>
             <a:xfrm>
               <a:off x="1600200" y="5074920"/>
-              <a:ext cx="353387" cy="274320"/>
+              <a:ext cx="295770" cy="274320"/>
             </a:xfrm>
             <a:prstGeom prst="roundRect">
               <a:avLst/>
@@ -11742,7 +12051,7 @@
           </p:nvSpPr>
           <p:spPr>
             <a:xfrm>
-              <a:off x="5879592" y="5047488"/>
+              <a:off x="5193792" y="5047488"/>
               <a:ext cx="548640" cy="274320"/>
             </a:xfrm>
             <a:prstGeom prst="rect">
@@ -11779,7 +12088,7 @@
           <p:spPr>
             <a:xfrm>
               <a:off x="1600200" y="5532120"/>
-              <a:ext cx="4206240" cy="274320"/>
+              <a:ext cx="3520440" cy="274320"/>
             </a:xfrm>
             <a:prstGeom prst="roundRect">
               <a:avLst/>
@@ -11808,7 +12117,7 @@
           <p:spPr>
             <a:xfrm>
               <a:off x="1600200" y="5532120"/>
-              <a:ext cx="223657" cy="274320"/>
+              <a:ext cx="187191" cy="274320"/>
             </a:xfrm>
             <a:prstGeom prst="roundRect">
               <a:avLst/>
@@ -11873,7 +12182,7 @@
           </p:nvSpPr>
           <p:spPr>
             <a:xfrm>
-              <a:off x="5879592" y="5504688"/>
+              <a:off x="5193792" y="5504688"/>
               <a:ext cx="548640" cy="274320"/>
             </a:xfrm>
             <a:prstGeom prst="rect">
@@ -11910,7 +12219,7 @@
           <p:spPr>
             <a:xfrm>
               <a:off x="1600200" y="5989320"/>
-              <a:ext cx="4206240" cy="274320"/>
+              <a:ext cx="3520440" cy="274320"/>
             </a:xfrm>
             <a:prstGeom prst="roundRect">
               <a:avLst/>
@@ -11939,7 +12248,7 @@
           <p:spPr>
             <a:xfrm>
               <a:off x="1600200" y="5989320"/>
-              <a:ext cx="195386" cy="274320"/>
+              <a:ext cx="163530" cy="274320"/>
             </a:xfrm>
             <a:prstGeom prst="roundRect">
               <a:avLst/>
@@ -12004,7 +12313,7 @@
           </p:nvSpPr>
           <p:spPr>
             <a:xfrm>
-              <a:off x="5879592" y="5961888"/>
+              <a:off x="5193792" y="5961888"/>
               <a:ext cx="548640" cy="274320"/>
             </a:xfrm>
             <a:prstGeom prst="rect">

--- a/deck/ict-deck.pptx
+++ b/deck/ict-deck.pptx
@@ -6678,7 +6678,7 @@
                 <a:ea typeface="微软雅黑"/>
                 <a:cs typeface="微软雅黑"/>
               </a:rPr>
-              <a:t>知识库全量导入按 batch 200 实测约 15.8 小时（1,864,451 块），但要占满写入窗口，故采用 15,494 块分层子集策略</a:t>
+              <a:t>知识库全量导入 10-27 发车、断点续跑吃批中（10-29 已入 60 万+/75.7 万块），满库后一键复跑刷新全部评测快照</a:t>
             </a:r>
           </a:p>
         </p:txBody>
@@ -6744,7 +6744,7 @@
                 <a:ea typeface="微软雅黑"/>
                 <a:cs typeface="微软雅黑"/>
               </a:rPr>
-              <a:t>下一步：知识库定全量筛选策略（15,494 块子集已入库）→ 人工确认闸门入库 → 第二行业真实语料迁移。</a:t>
+              <a:t>下一步：满库复跑刷新评测快照（replay 一键）→ 人工确认闸门入库 → 第二行业真实语料迁移。</a:t>
             </a:r>
           </a:p>
         </p:txBody>

--- a/deck/ict-deck.pptx
+++ b/deck/ict-deck.pptx
@@ -17,6 +17,7 @@
     <p:sldId id="265" r:id="rId16"/>
     <p:sldId id="266" r:id="rId17"/>
     <p:sldId id="267" r:id="rId18"/>
+    <p:sldId id="268" r:id="rId19"/>
   </p:sldIdLst>
   <p:sldSz cx="12192000" cy="6858000" type="screen4x3"/>
   <p:notesSz cx="6858000" cy="9144000"/>
@@ -3092,6 +3093,14 @@
 <file path=ppt/slides/slide1.xml><?xml version="1.0" encoding="utf-8"?>
 <p:sld xmlns:a="http://schemas.openxmlformats.org/drawingml/2006/main" xmlns:p="http://schemas.openxmlformats.org/presentationml/2006/main" xmlns:r="http://schemas.openxmlformats.org/officeDocument/2006/relationships">
   <p:cSld>
+    <p:bg>
+      <p:bgPr>
+        <a:solidFill>
+          <a:srgbClr val="EFEDE9"/>
+        </a:solidFill>
+        <a:effectLst/>
+      </p:bgPr>
+    </p:bg>
     <p:spTree>
       <p:nvGrpSpPr>
         <p:cNvPr id="1" name=""/>
@@ -3114,7 +3123,7 @@
             <a:avLst/>
           </a:prstGeom>
           <a:solidFill>
-            <a:srgbClr val="1E5AB8"/>
+            <a:srgbClr val="9B7247"/>
           </a:solidFill>
           <a:ln>
             <a:noFill/>
@@ -3154,7 +3163,7 @@
             <a:r>
               <a:rPr sz="1400" b="0">
                 <a:solidFill>
-                  <a:srgbClr val="6B7B8D"/>
+                  <a:srgbClr val="6E675F"/>
                 </a:solidFill>
                 <a:latin typeface="微软雅黑"/>
                 <a:ea typeface="微软雅黑"/>
@@ -3191,7 +3200,7 @@
             <a:r>
               <a:rPr sz="4200" b="1">
                 <a:solidFill>
-                  <a:srgbClr val="0A1E3D"/>
+                  <a:srgbClr val="080A08"/>
                 </a:solidFill>
                 <a:latin typeface="微软雅黑"/>
                 <a:ea typeface="微软雅黑"/>
@@ -3218,7 +3227,7 @@
             <a:avLst/>
           </a:prstGeom>
           <a:solidFill>
-            <a:srgbClr val="C77D0A"/>
+            <a:srgbClr val="8A6234"/>
           </a:solidFill>
           <a:ln>
             <a:noFill/>
@@ -3258,7 +3267,7 @@
             <a:r>
               <a:rPr sz="1900" b="0">
                 <a:solidFill>
-                  <a:srgbClr val="0A1E3D"/>
+                  <a:srgbClr val="080A08"/>
                 </a:solidFill>
                 <a:latin typeface="微软雅黑"/>
                 <a:ea typeface="微软雅黑"/>
@@ -3295,7 +3304,7 @@
             <a:r>
               <a:rPr sz="1250" b="0">
                 <a:solidFill>
-                  <a:srgbClr val="6B7B8D"/>
+                  <a:srgbClr val="6E675F"/>
                 </a:solidFill>
                 <a:latin typeface="微软雅黑"/>
                 <a:ea typeface="微软雅黑"/>
@@ -3317,6 +3326,14 @@
 <file path=ppt/slides/slide10.xml><?xml version="1.0" encoding="utf-8"?>
 <p:sld xmlns:a="http://schemas.openxmlformats.org/drawingml/2006/main" xmlns:p="http://schemas.openxmlformats.org/presentationml/2006/main" xmlns:r="http://schemas.openxmlformats.org/officeDocument/2006/relationships">
   <p:cSld>
+    <p:bg>
+      <p:bgPr>
+        <a:solidFill>
+          <a:srgbClr val="EFEDE9"/>
+        </a:solidFill>
+        <a:effectLst/>
+      </p:bgPr>
+    </p:bg>
     <p:spTree>
       <p:nvGrpSpPr>
         <p:cNvPr id="1" name=""/>
@@ -3350,7 +3367,7 @@
             <a:r>
               <a:rPr sz="2800" b="1">
                 <a:solidFill>
-                  <a:srgbClr val="0A1E3D"/>
+                  <a:srgbClr val="080A08"/>
                 </a:solidFill>
                 <a:latin typeface="微软雅黑"/>
                 <a:ea typeface="微软雅黑"/>
@@ -3387,7 +3404,7 @@
             <a:r>
               <a:rPr sz="1000" b="0">
                 <a:solidFill>
-                  <a:srgbClr val="6B7B8D"/>
+                  <a:srgbClr val="6E675F"/>
                 </a:solidFill>
                 <a:latin typeface="微软雅黑"/>
                 <a:ea typeface="微软雅黑"/>
@@ -3413,7 +3430,7 @@
             <a:avLst/>
           </a:prstGeom>
           <a:solidFill>
-            <a:srgbClr val="DEE5EF"/>
+            <a:srgbClr val="E6DFD4"/>
           </a:solidFill>
           <a:ln>
             <a:noFill/>
@@ -3442,7 +3459,7 @@
             <a:avLst/>
           </a:prstGeom>
           <a:solidFill>
-            <a:srgbClr val="1E5AB8"/>
+            <a:srgbClr val="9B7247"/>
           </a:solidFill>
           <a:ln>
             <a:noFill/>
@@ -3508,7 +3525,7 @@
             <a:avLst/>
           </a:prstGeom>
           <a:solidFill>
-            <a:srgbClr val="1E5AB8"/>
+            <a:srgbClr val="9B7247"/>
           </a:solidFill>
           <a:ln>
             <a:noFill/>
@@ -3574,7 +3591,7 @@
             <a:avLst/>
           </a:prstGeom>
           <a:solidFill>
-            <a:srgbClr val="1E5AB8"/>
+            <a:srgbClr val="9B7247"/>
           </a:solidFill>
           <a:ln>
             <a:noFill/>
@@ -3640,7 +3657,7 @@
             <a:avLst/>
           </a:prstGeom>
           <a:solidFill>
-            <a:srgbClr val="F0F4F8"/>
+            <a:srgbClr val="F7F4EE"/>
           </a:solidFill>
           <a:ln>
             <a:noFill/>
@@ -3680,7 +3697,7 @@
             <a:r>
               <a:rPr sz="1100" b="0">
                 <a:solidFill>
-                  <a:srgbClr val="0A1E3D"/>
+                  <a:srgbClr val="080A08"/>
                 </a:solidFill>
                 <a:latin typeface="微软雅黑"/>
                 <a:ea typeface="微软雅黑"/>
@@ -3706,7 +3723,7 @@
             <a:avLst/>
           </a:prstGeom>
           <a:solidFill>
-            <a:srgbClr val="F0F4F8"/>
+            <a:srgbClr val="F7F4EE"/>
           </a:solidFill>
           <a:ln>
             <a:noFill/>
@@ -3746,7 +3763,7 @@
             <a:r>
               <a:rPr sz="1100" b="0">
                 <a:solidFill>
-                  <a:srgbClr val="0A1E3D"/>
+                  <a:srgbClr val="080A08"/>
                 </a:solidFill>
                 <a:latin typeface="微软雅黑"/>
                 <a:ea typeface="微软雅黑"/>
@@ -3772,7 +3789,7 @@
             <a:avLst/>
           </a:prstGeom>
           <a:solidFill>
-            <a:srgbClr val="F0F4F8"/>
+            <a:srgbClr val="F7F4EE"/>
           </a:solidFill>
           <a:ln>
             <a:noFill/>
@@ -3812,7 +3829,7 @@
             <a:r>
               <a:rPr sz="1100" b="0">
                 <a:solidFill>
-                  <a:srgbClr val="0A1E3D"/>
+                  <a:srgbClr val="080A08"/>
                 </a:solidFill>
                 <a:latin typeface="微软雅黑"/>
                 <a:ea typeface="微软雅黑"/>
@@ -3849,7 +3866,7 @@
             <a:r>
               <a:rPr sz="1100" b="0">
                 <a:solidFill>
-                  <a:srgbClr val="0A1E3D"/>
+                  <a:srgbClr val="080A08"/>
                 </a:solidFill>
                 <a:latin typeface="微软雅黑"/>
                 <a:ea typeface="微软雅黑"/>
@@ -3886,7 +3903,7 @@
             <a:r>
               <a:rPr sz="1100" b="0">
                 <a:solidFill>
-                  <a:srgbClr val="0A1E3D"/>
+                  <a:srgbClr val="080A08"/>
                 </a:solidFill>
                 <a:latin typeface="微软雅黑"/>
                 <a:ea typeface="微软雅黑"/>
@@ -3923,7 +3940,7 @@
             <a:r>
               <a:rPr sz="1100" b="0">
                 <a:solidFill>
-                  <a:srgbClr val="0A1E3D"/>
+                  <a:srgbClr val="080A08"/>
                 </a:solidFill>
                 <a:latin typeface="微软雅黑"/>
                 <a:ea typeface="微软雅黑"/>
@@ -3949,7 +3966,7 @@
             <a:avLst/>
           </a:prstGeom>
           <a:solidFill>
-            <a:srgbClr val="F0F4F8"/>
+            <a:srgbClr val="F7F4EE"/>
           </a:solidFill>
           <a:ln>
             <a:noFill/>
@@ -3989,7 +4006,7 @@
             <a:r>
               <a:rPr sz="1100" b="0">
                 <a:solidFill>
-                  <a:srgbClr val="0A1E3D"/>
+                  <a:srgbClr val="080A08"/>
                 </a:solidFill>
                 <a:latin typeface="微软雅黑"/>
                 <a:ea typeface="微软雅黑"/>
@@ -4015,7 +4032,7 @@
             <a:avLst/>
           </a:prstGeom>
           <a:solidFill>
-            <a:srgbClr val="F0F4F8"/>
+            <a:srgbClr val="F7F4EE"/>
           </a:solidFill>
           <a:ln>
             <a:noFill/>
@@ -4055,7 +4072,7 @@
             <a:r>
               <a:rPr sz="1100" b="0">
                 <a:solidFill>
-                  <a:srgbClr val="0A1E3D"/>
+                  <a:srgbClr val="080A08"/>
                 </a:solidFill>
                 <a:latin typeface="微软雅黑"/>
                 <a:ea typeface="微软雅黑"/>
@@ -4081,7 +4098,7 @@
             <a:avLst/>
           </a:prstGeom>
           <a:solidFill>
-            <a:srgbClr val="F0F4F8"/>
+            <a:srgbClr val="F7F4EE"/>
           </a:solidFill>
           <a:ln>
             <a:noFill/>
@@ -4121,7 +4138,7 @@
             <a:r>
               <a:rPr sz="1100" b="0">
                 <a:solidFill>
-                  <a:srgbClr val="0A1E3D"/>
+                  <a:srgbClr val="080A08"/>
                 </a:solidFill>
                 <a:latin typeface="微软雅黑"/>
                 <a:ea typeface="微软雅黑"/>
@@ -4158,7 +4175,7 @@
             <a:r>
               <a:rPr sz="1100" b="0">
                 <a:solidFill>
-                  <a:srgbClr val="0A1E3D"/>
+                  <a:srgbClr val="080A08"/>
                 </a:solidFill>
                 <a:latin typeface="微软雅黑"/>
                 <a:ea typeface="微软雅黑"/>
@@ -4195,7 +4212,7 @@
             <a:r>
               <a:rPr sz="1100" b="0">
                 <a:solidFill>
-                  <a:srgbClr val="0A1E3D"/>
+                  <a:srgbClr val="080A08"/>
                 </a:solidFill>
                 <a:latin typeface="微软雅黑"/>
                 <a:ea typeface="微软雅黑"/>
@@ -4232,7 +4249,7 @@
             <a:r>
               <a:rPr sz="1100" b="0">
                 <a:solidFill>
-                  <a:srgbClr val="0A1E3D"/>
+                  <a:srgbClr val="080A08"/>
                 </a:solidFill>
                 <a:latin typeface="微软雅黑"/>
                 <a:ea typeface="微软雅黑"/>
@@ -4258,7 +4275,7 @@
             <a:avLst/>
           </a:prstGeom>
           <a:solidFill>
-            <a:srgbClr val="F0F4F8"/>
+            <a:srgbClr val="F7F4EE"/>
           </a:solidFill>
           <a:ln>
             <a:noFill/>
@@ -4298,7 +4315,7 @@
             <a:r>
               <a:rPr sz="1100" b="0">
                 <a:solidFill>
-                  <a:srgbClr val="0A1E3D"/>
+                  <a:srgbClr val="080A08"/>
                 </a:solidFill>
                 <a:latin typeface="微软雅黑"/>
                 <a:ea typeface="微软雅黑"/>
@@ -4324,7 +4341,7 @@
             <a:avLst/>
           </a:prstGeom>
           <a:solidFill>
-            <a:srgbClr val="F0F4F8"/>
+            <a:srgbClr val="F7F4EE"/>
           </a:solidFill>
           <a:ln>
             <a:noFill/>
@@ -4364,7 +4381,7 @@
             <a:r>
               <a:rPr sz="1100" b="0">
                 <a:solidFill>
-                  <a:srgbClr val="0A1E3D"/>
+                  <a:srgbClr val="080A08"/>
                 </a:solidFill>
                 <a:latin typeface="微软雅黑"/>
                 <a:ea typeface="微软雅黑"/>
@@ -4390,7 +4407,7 @@
             <a:avLst/>
           </a:prstGeom>
           <a:solidFill>
-            <a:srgbClr val="F0F4F8"/>
+            <a:srgbClr val="F7F4EE"/>
           </a:solidFill>
           <a:ln>
             <a:noFill/>
@@ -4430,7 +4447,7 @@
             <a:r>
               <a:rPr sz="1100" b="0">
                 <a:solidFill>
-                  <a:srgbClr val="0A1E3D"/>
+                  <a:srgbClr val="080A08"/>
                 </a:solidFill>
                 <a:latin typeface="微软雅黑"/>
                 <a:ea typeface="微软雅黑"/>
@@ -4467,7 +4484,7 @@
             <a:r>
               <a:rPr sz="1250" b="0">
                 <a:solidFill>
-                  <a:srgbClr val="0A1E3D"/>
+                  <a:srgbClr val="080A08"/>
                 </a:solidFill>
                 <a:latin typeface="微软雅黑"/>
                 <a:ea typeface="微软雅黑"/>
@@ -4501,17 +4518,8 @@
           </a:bodyPr>
           <a:lstStyle/>
           <a:p>
-            <a:pPr algn="r"/>
-            <a:r>
-              <a:rPr sz="1000" b="0">
-                <a:solidFill>
-                  <a:srgbClr val="6B7B8D"/>
-                </a:solidFill>
-                <a:latin typeface="微软雅黑"/>
-                <a:ea typeface="微软雅黑"/>
-                <a:cs typeface="微软雅黑"/>
-              </a:rPr>
-              <a:t>10 / 12</a:t>
+            <a:r>
+              <a:t>11 / 13</a:t>
             </a:r>
           </a:p>
         </p:txBody>
@@ -4527,6 +4535,14 @@
 <file path=ppt/slides/slide11.xml><?xml version="1.0" encoding="utf-8"?>
 <p:sld xmlns:a="http://schemas.openxmlformats.org/drawingml/2006/main" xmlns:p="http://schemas.openxmlformats.org/presentationml/2006/main" xmlns:r="http://schemas.openxmlformats.org/officeDocument/2006/relationships">
   <p:cSld>
+    <p:bg>
+      <p:bgPr>
+        <a:solidFill>
+          <a:srgbClr val="EFEDE9"/>
+        </a:solidFill>
+        <a:effectLst/>
+      </p:bgPr>
+    </p:bg>
     <p:spTree>
       <p:nvGrpSpPr>
         <p:cNvPr id="1" name=""/>
@@ -4560,7 +4576,7 @@
             <a:r>
               <a:rPr sz="2800" b="1">
                 <a:solidFill>
-                  <a:srgbClr val="0A1E3D"/>
+                  <a:srgbClr val="080A08"/>
                 </a:solidFill>
                 <a:latin typeface="微软雅黑"/>
                 <a:ea typeface="微软雅黑"/>
@@ -4597,7 +4613,7 @@
             <a:r>
               <a:rPr sz="1000" b="0">
                 <a:solidFill>
-                  <a:srgbClr val="6B7B8D"/>
+                  <a:srgbClr val="6E675F"/>
                 </a:solidFill>
                 <a:latin typeface="微软雅黑"/>
                 <a:ea typeface="微软雅黑"/>
@@ -4623,7 +4639,7 @@
             <a:avLst/>
           </a:prstGeom>
           <a:solidFill>
-            <a:srgbClr val="DEE5EF"/>
+            <a:srgbClr val="E6DFD4"/>
           </a:solidFill>
           <a:ln>
             <a:noFill/>
@@ -4652,7 +4668,7 @@
             <a:avLst/>
           </a:prstGeom>
           <a:solidFill>
-            <a:srgbClr val="1E5AB8"/>
+            <a:srgbClr val="9B7247"/>
           </a:solidFill>
           <a:ln>
             <a:noFill/>
@@ -4718,7 +4734,7 @@
             <a:avLst/>
           </a:prstGeom>
           <a:solidFill>
-            <a:srgbClr val="1E5AB8"/>
+            <a:srgbClr val="9B7247"/>
           </a:solidFill>
           <a:ln>
             <a:noFill/>
@@ -4784,7 +4800,7 @@
             <a:avLst/>
           </a:prstGeom>
           <a:solidFill>
-            <a:srgbClr val="1E5AB8"/>
+            <a:srgbClr val="9B7247"/>
           </a:solidFill>
           <a:ln>
             <a:noFill/>
@@ -4850,7 +4866,7 @@
             <a:avLst/>
           </a:prstGeom>
           <a:solidFill>
-            <a:srgbClr val="F0F4F8"/>
+            <a:srgbClr val="F7F4EE"/>
           </a:solidFill>
           <a:ln>
             <a:noFill/>
@@ -4890,7 +4906,7 @@
             <a:r>
               <a:rPr sz="1050" b="0">
                 <a:solidFill>
-                  <a:srgbClr val="0A1E3D"/>
+                  <a:srgbClr val="080A08"/>
                 </a:solidFill>
                 <a:latin typeface="微软雅黑"/>
                 <a:ea typeface="微软雅黑"/>
@@ -4916,7 +4932,7 @@
             <a:avLst/>
           </a:prstGeom>
           <a:solidFill>
-            <a:srgbClr val="F0F4F8"/>
+            <a:srgbClr val="F7F4EE"/>
           </a:solidFill>
           <a:ln>
             <a:noFill/>
@@ -4956,7 +4972,7 @@
             <a:r>
               <a:rPr sz="1050" b="0">
                 <a:solidFill>
-                  <a:srgbClr val="0A1E3D"/>
+                  <a:srgbClr val="080A08"/>
                 </a:solidFill>
                 <a:latin typeface="微软雅黑"/>
                 <a:ea typeface="微软雅黑"/>
@@ -4982,7 +4998,7 @@
             <a:avLst/>
           </a:prstGeom>
           <a:solidFill>
-            <a:srgbClr val="F0F4F8"/>
+            <a:srgbClr val="F7F4EE"/>
           </a:solidFill>
           <a:ln>
             <a:noFill/>
@@ -5022,7 +5038,7 @@
             <a:r>
               <a:rPr sz="1050" b="0">
                 <a:solidFill>
-                  <a:srgbClr val="0A1E3D"/>
+                  <a:srgbClr val="080A08"/>
                 </a:solidFill>
                 <a:latin typeface="微软雅黑"/>
                 <a:ea typeface="微软雅黑"/>
@@ -5059,7 +5075,7 @@
             <a:r>
               <a:rPr sz="1050" b="0">
                 <a:solidFill>
-                  <a:srgbClr val="0A1E3D"/>
+                  <a:srgbClr val="080A08"/>
                 </a:solidFill>
                 <a:latin typeface="微软雅黑"/>
                 <a:ea typeface="微软雅黑"/>
@@ -5096,7 +5112,7 @@
             <a:r>
               <a:rPr sz="1050" b="0">
                 <a:solidFill>
-                  <a:srgbClr val="0A1E3D"/>
+                  <a:srgbClr val="080A08"/>
                 </a:solidFill>
                 <a:latin typeface="微软雅黑"/>
                 <a:ea typeface="微软雅黑"/>
@@ -5133,7 +5149,7 @@
             <a:r>
               <a:rPr sz="1050" b="0">
                 <a:solidFill>
-                  <a:srgbClr val="0A1E3D"/>
+                  <a:srgbClr val="080A08"/>
                 </a:solidFill>
                 <a:latin typeface="微软雅黑"/>
                 <a:ea typeface="微软雅黑"/>
@@ -5159,7 +5175,7 @@
             <a:avLst/>
           </a:prstGeom>
           <a:solidFill>
-            <a:srgbClr val="F0F4F8"/>
+            <a:srgbClr val="F7F4EE"/>
           </a:solidFill>
           <a:ln>
             <a:noFill/>
@@ -5199,7 +5215,7 @@
             <a:r>
               <a:rPr sz="1050" b="0">
                 <a:solidFill>
-                  <a:srgbClr val="0A1E3D"/>
+                  <a:srgbClr val="080A08"/>
                 </a:solidFill>
                 <a:latin typeface="微软雅黑"/>
                 <a:ea typeface="微软雅黑"/>
@@ -5225,7 +5241,7 @@
             <a:avLst/>
           </a:prstGeom>
           <a:solidFill>
-            <a:srgbClr val="F0F4F8"/>
+            <a:srgbClr val="F7F4EE"/>
           </a:solidFill>
           <a:ln>
             <a:noFill/>
@@ -5265,7 +5281,7 @@
             <a:r>
               <a:rPr sz="1050" b="0">
                 <a:solidFill>
-                  <a:srgbClr val="0A1E3D"/>
+                  <a:srgbClr val="080A08"/>
                 </a:solidFill>
                 <a:latin typeface="微软雅黑"/>
                 <a:ea typeface="微软雅黑"/>
@@ -5291,7 +5307,7 @@
             <a:avLst/>
           </a:prstGeom>
           <a:solidFill>
-            <a:srgbClr val="F0F4F8"/>
+            <a:srgbClr val="F7F4EE"/>
           </a:solidFill>
           <a:ln>
             <a:noFill/>
@@ -5331,7 +5347,7 @@
             <a:r>
               <a:rPr sz="1050" b="0">
                 <a:solidFill>
-                  <a:srgbClr val="0A1E3D"/>
+                  <a:srgbClr val="080A08"/>
                 </a:solidFill>
                 <a:latin typeface="微软雅黑"/>
                 <a:ea typeface="微软雅黑"/>
@@ -5368,7 +5384,7 @@
             <a:r>
               <a:rPr sz="1050" b="0">
                 <a:solidFill>
-                  <a:srgbClr val="0A1E3D"/>
+                  <a:srgbClr val="080A08"/>
                 </a:solidFill>
                 <a:latin typeface="微软雅黑"/>
                 <a:ea typeface="微软雅黑"/>
@@ -5405,7 +5421,7 @@
             <a:r>
               <a:rPr sz="1050" b="0">
                 <a:solidFill>
-                  <a:srgbClr val="0A1E3D"/>
+                  <a:srgbClr val="080A08"/>
                 </a:solidFill>
                 <a:latin typeface="微软雅黑"/>
                 <a:ea typeface="微软雅黑"/>
@@ -5442,7 +5458,7 @@
             <a:r>
               <a:rPr sz="1050" b="0">
                 <a:solidFill>
-                  <a:srgbClr val="0A1E3D"/>
+                  <a:srgbClr val="080A08"/>
                 </a:solidFill>
                 <a:latin typeface="微软雅黑"/>
                 <a:ea typeface="微软雅黑"/>
@@ -5468,7 +5484,7 @@
             <a:avLst/>
           </a:prstGeom>
           <a:solidFill>
-            <a:srgbClr val="F0F4F8"/>
+            <a:srgbClr val="F7F4EE"/>
           </a:solidFill>
           <a:ln>
             <a:noFill/>
@@ -5508,7 +5524,7 @@
             <a:r>
               <a:rPr sz="1050" b="0">
                 <a:solidFill>
-                  <a:srgbClr val="0A1E3D"/>
+                  <a:srgbClr val="080A08"/>
                 </a:solidFill>
                 <a:latin typeface="微软雅黑"/>
                 <a:ea typeface="微软雅黑"/>
@@ -5534,7 +5550,7 @@
             <a:avLst/>
           </a:prstGeom>
           <a:solidFill>
-            <a:srgbClr val="F0F4F8"/>
+            <a:srgbClr val="F7F4EE"/>
           </a:solidFill>
           <a:ln>
             <a:noFill/>
@@ -5574,7 +5590,7 @@
             <a:r>
               <a:rPr sz="1050" b="0">
                 <a:solidFill>
-                  <a:srgbClr val="0A1E3D"/>
+                  <a:srgbClr val="080A08"/>
                 </a:solidFill>
                 <a:latin typeface="微软雅黑"/>
                 <a:ea typeface="微软雅黑"/>
@@ -5600,7 +5616,7 @@
             <a:avLst/>
           </a:prstGeom>
           <a:solidFill>
-            <a:srgbClr val="F0F4F8"/>
+            <a:srgbClr val="F7F4EE"/>
           </a:solidFill>
           <a:ln>
             <a:noFill/>
@@ -5640,7 +5656,7 @@
             <a:r>
               <a:rPr sz="1050" b="0">
                 <a:solidFill>
-                  <a:srgbClr val="0A1E3D"/>
+                  <a:srgbClr val="080A08"/>
                 </a:solidFill>
                 <a:latin typeface="微软雅黑"/>
                 <a:ea typeface="微软雅黑"/>
@@ -5677,7 +5693,7 @@
             <a:r>
               <a:rPr sz="1050" b="0">
                 <a:solidFill>
-                  <a:srgbClr val="0A1E3D"/>
+                  <a:srgbClr val="080A08"/>
                 </a:solidFill>
                 <a:latin typeface="微软雅黑"/>
                 <a:ea typeface="微软雅黑"/>
@@ -5714,7 +5730,7 @@
             <a:r>
               <a:rPr sz="1050" b="0">
                 <a:solidFill>
-                  <a:srgbClr val="0A1E3D"/>
+                  <a:srgbClr val="080A08"/>
                 </a:solidFill>
                 <a:latin typeface="微软雅黑"/>
                 <a:ea typeface="微软雅黑"/>
@@ -5751,7 +5767,7 @@
             <a:r>
               <a:rPr sz="1050" b="0">
                 <a:solidFill>
-                  <a:srgbClr val="0A1E3D"/>
+                  <a:srgbClr val="080A08"/>
                 </a:solidFill>
                 <a:latin typeface="微软雅黑"/>
                 <a:ea typeface="微软雅黑"/>
@@ -5777,7 +5793,7 @@
             <a:avLst/>
           </a:prstGeom>
           <a:solidFill>
-            <a:srgbClr val="F0F4F8"/>
+            <a:srgbClr val="F7F4EE"/>
           </a:solidFill>
           <a:ln>
             <a:noFill/>
@@ -5817,7 +5833,7 @@
             <a:r>
               <a:rPr sz="1050" b="0">
                 <a:solidFill>
-                  <a:srgbClr val="0A1E3D"/>
+                  <a:srgbClr val="080A08"/>
                 </a:solidFill>
                 <a:latin typeface="微软雅黑"/>
                 <a:ea typeface="微软雅黑"/>
@@ -5843,7 +5859,7 @@
             <a:avLst/>
           </a:prstGeom>
           <a:solidFill>
-            <a:srgbClr val="F0F4F8"/>
+            <a:srgbClr val="F7F4EE"/>
           </a:solidFill>
           <a:ln>
             <a:noFill/>
@@ -5883,7 +5899,7 @@
             <a:r>
               <a:rPr sz="1050" b="0">
                 <a:solidFill>
-                  <a:srgbClr val="0A1E3D"/>
+                  <a:srgbClr val="080A08"/>
                 </a:solidFill>
                 <a:latin typeface="微软雅黑"/>
                 <a:ea typeface="微软雅黑"/>
@@ -5909,7 +5925,7 @@
             <a:avLst/>
           </a:prstGeom>
           <a:solidFill>
-            <a:srgbClr val="F0F4F8"/>
+            <a:srgbClr val="F7F4EE"/>
           </a:solidFill>
           <a:ln>
             <a:noFill/>
@@ -5949,7 +5965,7 @@
             <a:r>
               <a:rPr sz="1050" b="0">
                 <a:solidFill>
-                  <a:srgbClr val="0A1E3D"/>
+                  <a:srgbClr val="080A08"/>
                 </a:solidFill>
                 <a:latin typeface="微软雅黑"/>
                 <a:ea typeface="微软雅黑"/>
@@ -5986,7 +6002,7 @@
             <a:r>
               <a:rPr sz="1200" b="0">
                 <a:solidFill>
-                  <a:srgbClr val="0A1E3D"/>
+                  <a:srgbClr val="080A08"/>
                 </a:solidFill>
                 <a:latin typeface="微软雅黑"/>
                 <a:ea typeface="微软雅黑"/>
@@ -6019,17 +6035,8 @@
           </a:bodyPr>
           <a:lstStyle/>
           <a:p>
-            <a:pPr algn="r"/>
-            <a:r>
-              <a:rPr sz="1000" b="0">
-                <a:solidFill>
-                  <a:srgbClr val="6B7B8D"/>
-                </a:solidFill>
-                <a:latin typeface="微软雅黑"/>
-                <a:ea typeface="微软雅黑"/>
-                <a:cs typeface="微软雅黑"/>
-              </a:rPr>
-              <a:t>11 / 12</a:t>
+            <a:r>
+              <a:t>12 / 13</a:t>
             </a:r>
           </a:p>
         </p:txBody>
@@ -6045,6 +6052,14 @@
 <file path=ppt/slides/slide12.xml><?xml version="1.0" encoding="utf-8"?>
 <p:sld xmlns:a="http://schemas.openxmlformats.org/drawingml/2006/main" xmlns:p="http://schemas.openxmlformats.org/presentationml/2006/main" xmlns:r="http://schemas.openxmlformats.org/officeDocument/2006/relationships">
   <p:cSld>
+    <p:bg>
+      <p:bgPr>
+        <a:solidFill>
+          <a:srgbClr val="EFEDE9"/>
+        </a:solidFill>
+        <a:effectLst/>
+      </p:bgPr>
+    </p:bg>
     <p:spTree>
       <p:nvGrpSpPr>
         <p:cNvPr id="1" name=""/>
@@ -6078,7 +6093,7 @@
             <a:r>
               <a:rPr sz="2800" b="1">
                 <a:solidFill>
-                  <a:srgbClr val="0A1E3D"/>
+                  <a:srgbClr val="080A08"/>
                 </a:solidFill>
                 <a:latin typeface="微软雅黑"/>
                 <a:ea typeface="微软雅黑"/>
@@ -6115,7 +6130,7 @@
             <a:r>
               <a:rPr sz="1000" b="0">
                 <a:solidFill>
-                  <a:srgbClr val="6B7B8D"/>
+                  <a:srgbClr val="6E675F"/>
                 </a:solidFill>
                 <a:latin typeface="微软雅黑"/>
                 <a:ea typeface="微软雅黑"/>
@@ -6141,7 +6156,7 @@
             <a:avLst/>
           </a:prstGeom>
           <a:solidFill>
-            <a:srgbClr val="DEE5EF"/>
+            <a:srgbClr val="E6DFD4"/>
           </a:solidFill>
           <a:ln>
             <a:noFill/>
@@ -6170,7 +6185,7 @@
             <a:avLst/>
           </a:prstGeom>
           <a:solidFill>
-            <a:srgbClr val="A33A2A"/>
+            <a:srgbClr val="9E4A2B"/>
           </a:solidFill>
           <a:ln>
             <a:noFill/>
@@ -6210,7 +6225,7 @@
             <a:r>
               <a:rPr sz="1150" b="0">
                 <a:solidFill>
-                  <a:srgbClr val="0A1E3D"/>
+                  <a:srgbClr val="080A08"/>
                 </a:solidFill>
                 <a:latin typeface="微软雅黑"/>
                 <a:ea typeface="微软雅黑"/>
@@ -6236,7 +6251,7 @@
             <a:avLst/>
           </a:prstGeom>
           <a:solidFill>
-            <a:srgbClr val="A33A2A"/>
+            <a:srgbClr val="9E4A2B"/>
           </a:solidFill>
           <a:ln>
             <a:noFill/>
@@ -6276,7 +6291,7 @@
             <a:r>
               <a:rPr sz="1150" b="0">
                 <a:solidFill>
-                  <a:srgbClr val="0A1E3D"/>
+                  <a:srgbClr val="080A08"/>
                 </a:solidFill>
                 <a:latin typeface="微软雅黑"/>
                 <a:ea typeface="微软雅黑"/>
@@ -6302,7 +6317,7 @@
             <a:avLst/>
           </a:prstGeom>
           <a:solidFill>
-            <a:srgbClr val="A33A2A"/>
+            <a:srgbClr val="9E4A2B"/>
           </a:solidFill>
           <a:ln>
             <a:noFill/>
@@ -6342,7 +6357,7 @@
             <a:r>
               <a:rPr sz="1150" b="0">
                 <a:solidFill>
-                  <a:srgbClr val="0A1E3D"/>
+                  <a:srgbClr val="080A08"/>
                 </a:solidFill>
                 <a:latin typeface="微软雅黑"/>
                 <a:ea typeface="微软雅黑"/>
@@ -6368,7 +6383,7 @@
             <a:avLst/>
           </a:prstGeom>
           <a:solidFill>
-            <a:srgbClr val="A33A2A"/>
+            <a:srgbClr val="9E4A2B"/>
           </a:solidFill>
           <a:ln>
             <a:noFill/>
@@ -6408,7 +6423,7 @@
             <a:r>
               <a:rPr sz="1150" b="0">
                 <a:solidFill>
-                  <a:srgbClr val="0A1E3D"/>
+                  <a:srgbClr val="080A08"/>
                 </a:solidFill>
                 <a:latin typeface="微软雅黑"/>
                 <a:ea typeface="微软雅黑"/>
@@ -6434,7 +6449,7 @@
             <a:avLst/>
           </a:prstGeom>
           <a:solidFill>
-            <a:srgbClr val="A33A2A"/>
+            <a:srgbClr val="9E4A2B"/>
           </a:solidFill>
           <a:ln>
             <a:noFill/>
@@ -6474,7 +6489,7 @@
             <a:r>
               <a:rPr sz="1150" b="0">
                 <a:solidFill>
-                  <a:srgbClr val="0A1E3D"/>
+                  <a:srgbClr val="080A08"/>
                 </a:solidFill>
                 <a:latin typeface="微软雅黑"/>
                 <a:ea typeface="微软雅黑"/>
@@ -6500,7 +6515,7 @@
             <a:avLst/>
           </a:prstGeom>
           <a:solidFill>
-            <a:srgbClr val="A33A2A"/>
+            <a:srgbClr val="9E4A2B"/>
           </a:solidFill>
           <a:ln>
             <a:noFill/>
@@ -6540,7 +6555,7 @@
             <a:r>
               <a:rPr sz="1150" b="0">
                 <a:solidFill>
-                  <a:srgbClr val="0A1E3D"/>
+                  <a:srgbClr val="080A08"/>
                 </a:solidFill>
                 <a:latin typeface="微软雅黑"/>
                 <a:ea typeface="微软雅黑"/>
@@ -6566,7 +6581,7 @@
             <a:avLst/>
           </a:prstGeom>
           <a:solidFill>
-            <a:srgbClr val="A33A2A"/>
+            <a:srgbClr val="9E4A2B"/>
           </a:solidFill>
           <a:ln>
             <a:noFill/>
@@ -6606,7 +6621,7 @@
             <a:r>
               <a:rPr sz="1150" b="0">
                 <a:solidFill>
-                  <a:srgbClr val="0A1E3D"/>
+                  <a:srgbClr val="080A08"/>
                 </a:solidFill>
                 <a:latin typeface="微软雅黑"/>
                 <a:ea typeface="微软雅黑"/>
@@ -6632,7 +6647,7 @@
             <a:avLst/>
           </a:prstGeom>
           <a:solidFill>
-            <a:srgbClr val="A33A2A"/>
+            <a:srgbClr val="9E4A2B"/>
           </a:solidFill>
           <a:ln>
             <a:noFill/>
@@ -6672,13 +6687,11 @@
             <a:r>
               <a:rPr sz="1150" b="0">
                 <a:solidFill>
-                  <a:srgbClr val="0A1E3D"/>
-                </a:solidFill>
-                <a:latin typeface="微软雅黑"/>
-                <a:ea typeface="微软雅黑"/>
-                <a:cs typeface="微软雅黑"/>
-              </a:rPr>
-              <a:t>知识库全量导入 10-27 发车、断点续跑吃批中（10-29 已入 60 万+/75.7 万块），满库后一键复跑刷新全部评测快照</a:t>
+                  <a:srgbClr val="080A08"/>
+                </a:solidFill>
+                <a:latin typeface="微软雅黑"/>
+              </a:rPr>
+              <a:t>知识库 10-27 发车、10-30 满库（ES 1,874,596 块 / chunks 1,864,451）；满库复跑已完成（20261030-1118，R MRR 0.8494→0.8711），A2 门控 M/X 双 FAIL、冠军维持 τ=0.8505</a:t>
             </a:r>
           </a:p>
         </p:txBody>
@@ -6698,7 +6711,7 @@
             <a:avLst/>
           </a:prstGeom>
           <a:solidFill>
-            <a:srgbClr val="DEE5EF"/>
+            <a:srgbClr val="E6DFD4"/>
           </a:solidFill>
           <a:ln>
             <a:noFill/>
@@ -6738,7 +6751,7 @@
             <a:r>
               <a:rPr sz="1250" b="0">
                 <a:solidFill>
-                  <a:srgbClr val="0A1E3D"/>
+                  <a:srgbClr val="080A08"/>
                 </a:solidFill>
                 <a:latin typeface="微软雅黑"/>
                 <a:ea typeface="微软雅黑"/>
@@ -6771,17 +6784,788 @@
           </a:bodyPr>
           <a:lstStyle/>
           <a:p>
-            <a:pPr algn="r"/>
+            <a:r>
+              <a:t>13 / 13</a:t>
+            </a:r>
+          </a:p>
+        </p:txBody>
+      </p:sp>
+    </p:spTree>
+  </p:cSld>
+  <p:clrMapOvr>
+    <a:masterClrMapping/>
+  </p:clrMapOvr>
+</p:sld>
+</file>
+
+<file path=ppt/slides/slide13.xml><?xml version="1.0" encoding="utf-8"?>
+<p:sld xmlns:a="http://schemas.openxmlformats.org/drawingml/2006/main" xmlns:p="http://schemas.openxmlformats.org/presentationml/2006/main" xmlns:r="http://schemas.openxmlformats.org/officeDocument/2006/relationships">
+  <p:cSld>
+    <p:bg>
+      <p:bgPr>
+        <a:solidFill>
+          <a:srgbClr val="EFEDE9"/>
+        </a:solidFill>
+        <a:effectLst/>
+      </p:bgPr>
+    </p:bg>
+    <p:spTree>
+      <p:nvGrpSpPr>
+        <p:cNvPr id="1" name=""/>
+        <p:cNvGrpSpPr/>
+        <p:nvPr/>
+      </p:nvGrpSpPr>
+      <p:grpSpPr/>
+      <p:sp>
+        <p:nvSpPr>
+          <p:cNvPr id="2" name="TextBox 1"/>
+          <p:cNvSpPr txBox="1"/>
+          <p:nvPr/>
+        </p:nvSpPr>
+        <p:spPr>
+          <a:xfrm>
+            <a:off x="640080" y="457200"/>
+            <a:ext cx="10972800" cy="457200"/>
+          </a:xfrm>
+          <a:prstGeom prst="rect">
+            <a:avLst/>
+          </a:prstGeom>
+          <a:noFill/>
+        </p:spPr>
+        <p:txBody>
+          <a:bodyPr wrap="square">
+            <a:spAutoFit/>
+          </a:bodyPr>
+          <a:lstStyle/>
+          <a:p>
+            <a:r>
+              <a:rPr sz="2800" b="1">
+                <a:solidFill>
+                  <a:srgbClr val="080A08"/>
+                </a:solidFill>
+                <a:latin typeface="微软雅黑"/>
+              </a:rPr>
+              <a:t>开源与合规声明 / OPEN SOURCE &amp; COMPLIANCE</a:t>
+            </a:r>
+          </a:p>
+        </p:txBody>
+      </p:sp>
+      <p:sp>
+        <p:nvSpPr>
+          <p:cNvPr id="3" name="TextBox 2"/>
+          <p:cNvSpPr txBox="1"/>
+          <p:nvPr/>
+        </p:nvSpPr>
+        <p:spPr>
+          <a:xfrm>
+            <a:off x="640080" y="914400"/>
+            <a:ext cx="10972800" cy="228600"/>
+          </a:xfrm>
+          <a:prstGeom prst="rect">
+            <a:avLst/>
+          </a:prstGeom>
+          <a:noFill/>
+        </p:spPr>
+        <p:txBody>
+          <a:bodyPr wrap="square">
+            <a:spAutoFit/>
+          </a:bodyPr>
+          <a:lstStyle/>
+          <a:p>
             <a:r>
               <a:rPr sz="1000" b="0">
                 <a:solidFill>
-                  <a:srgbClr val="6B7B8D"/>
-                </a:solidFill>
-                <a:latin typeface="微软雅黑"/>
-                <a:ea typeface="微软雅黑"/>
-                <a:cs typeface="微软雅黑"/>
-              </a:rPr>
-              <a:t>12 / 12</a:t>
+                  <a:srgbClr val="6E675F"/>
+                </a:solidFill>
+                <a:latin typeface="微软雅黑"/>
+              </a:rPr>
+              <a:t>全部组件许可可查 · 我方改动可审计 · 品牌标识全部原创重绘</a:t>
+            </a:r>
+          </a:p>
+        </p:txBody>
+      </p:sp>
+      <p:graphicFrame>
+        <p:nvGraphicFramePr>
+          <p:cNvPr id="4" name="Table 3"/>
+          <p:cNvGraphicFramePr>
+            <a:graphicFrameLocks noGrp="1"/>
+          </p:cNvGraphicFramePr>
+          <p:nvPr/>
+        </p:nvGraphicFramePr>
+        <p:xfrm>
+          <a:off x="640080" y="1325880"/>
+          <a:ext cx="10972800" cy="2651760"/>
+        </p:xfrm>
+        <a:graphic>
+          <a:graphicData uri="http://schemas.openxmlformats.org/drawingml/2006/table">
+            <a:tbl>
+              <a:tblPr firstRow="1" bandRow="1">
+                <a:tableStyleId>{5C22544A-7EE6-4342-B048-85BDC9FD1C3A}</a:tableStyleId>
+              </a:tblPr>
+              <a:tblGrid>
+                <a:gridCol w="2834640"/>
+                <a:gridCol w="1554480"/>
+                <a:gridCol w="3291840"/>
+                <a:gridCol w="3291840"/>
+              </a:tblGrid>
+              <a:tr h="441960">
+                <a:tc>
+                  <a:txBody>
+                    <a:bodyPr/>
+                    <a:lstStyle/>
+                    <a:p>
+                      <a:r>
+                        <a:rPr sz="1050" b="1">
+                          <a:solidFill>
+                            <a:srgbClr val="080A08"/>
+                          </a:solidFill>
+                          <a:latin typeface="微软雅黑"/>
+                        </a:rPr>
+                        <a:t>组件</a:t>
+                      </a:r>
+                    </a:p>
+                  </a:txBody>
+                  <a:tcPr/>
+                </a:tc>
+                <a:tc>
+                  <a:txBody>
+                    <a:bodyPr/>
+                    <a:lstStyle/>
+                    <a:p>
+                      <a:r>
+                        <a:rPr sz="1050" b="1">
+                          <a:solidFill>
+                            <a:srgbClr val="080A08"/>
+                          </a:solidFill>
+                          <a:latin typeface="微软雅黑"/>
+                        </a:rPr>
+                        <a:t>许可证</a:t>
+                      </a:r>
+                    </a:p>
+                  </a:txBody>
+                  <a:tcPr/>
+                </a:tc>
+                <a:tc>
+                  <a:txBody>
+                    <a:bodyPr/>
+                    <a:lstStyle/>
+                    <a:p>
+                      <a:r>
+                        <a:rPr sz="1050" b="1">
+                          <a:solidFill>
+                            <a:srgbClr val="080A08"/>
+                          </a:solidFill>
+                          <a:latin typeface="微软雅黑"/>
+                        </a:rPr>
+                        <a:t>用途</a:t>
+                      </a:r>
+                    </a:p>
+                  </a:txBody>
+                  <a:tcPr/>
+                </a:tc>
+                <a:tc>
+                  <a:txBody>
+                    <a:bodyPr/>
+                    <a:lstStyle/>
+                    <a:p>
+                      <a:r>
+                        <a:rPr sz="1050" b="1">
+                          <a:solidFill>
+                            <a:srgbClr val="080A08"/>
+                          </a:solidFill>
+                          <a:latin typeface="微软雅黑"/>
+                        </a:rPr>
+                        <a:t>我方改动</a:t>
+                      </a:r>
+                    </a:p>
+                  </a:txBody>
+                  <a:tcPr/>
+                </a:tc>
+              </a:tr>
+              <a:tr h="441960">
+                <a:tc>
+                  <a:txBody>
+                    <a:bodyPr/>
+                    <a:lstStyle/>
+                    <a:p>
+                      <a:r>
+                        <a:rPr sz="950" b="0">
+                          <a:solidFill>
+                            <a:srgbClr val="080A08"/>
+                          </a:solidFill>
+                          <a:latin typeface="微软雅黑"/>
+                        </a:rPr>
+                        <a:t>Nexent 平台</a:t>
+                      </a:r>
+                    </a:p>
+                  </a:txBody>
+                  <a:tcPr/>
+                </a:tc>
+                <a:tc>
+                  <a:txBody>
+                    <a:bodyPr/>
+                    <a:lstStyle/>
+                    <a:p>
+                      <a:r>
+                        <a:rPr sz="950" b="0">
+                          <a:solidFill>
+                            <a:srgbClr val="6E675F"/>
+                          </a:solidFill>
+                          <a:latin typeface="微软雅黑"/>
+                        </a:rPr>
+                        <a:t>MIT</a:t>
+                      </a:r>
+                    </a:p>
+                  </a:txBody>
+                  <a:tcPr/>
+                </a:tc>
+                <a:tc>
+                  <a:txBody>
+                    <a:bodyPr/>
+                    <a:lstStyle/>
+                    <a:p>
+                      <a:r>
+                        <a:rPr sz="950" b="0">
+                          <a:solidFill>
+                            <a:srgbClr val="080A08"/>
+                          </a:solidFill>
+                          <a:latin typeface="微软雅黑"/>
+                        </a:rPr>
+                        <a:t>智能体底座（检索/索引/编排）</a:t>
+                      </a:r>
+                    </a:p>
+                  </a:txBody>
+                  <a:tcPr/>
+                </a:tc>
+                <a:tc>
+                  <a:txBody>
+                    <a:bodyPr/>
+                    <a:lstStyle/>
+                    <a:p>
+                      <a:r>
+                        <a:rPr sz="950" b="0">
+                          <a:solidFill>
+                            <a:srgbClr val="080A08"/>
+                          </a:solidFill>
+                          <a:latin typeface="微软雅黑"/>
+                        </a:rPr>
+                        <a:t>治理技能接入、评测门控对接；LOGO 与版权信息原样保留</a:t>
+                      </a:r>
+                    </a:p>
+                  </a:txBody>
+                  <a:tcPr/>
+                </a:tc>
+              </a:tr>
+              <a:tr h="441960">
+                <a:tc>
+                  <a:txBody>
+                    <a:bodyPr/>
+                    <a:lstStyle/>
+                    <a:p>
+                      <a:r>
+                        <a:rPr sz="950" b="0">
+                          <a:solidFill>
+                            <a:srgbClr val="080A08"/>
+                          </a:solidFill>
+                          <a:latin typeface="微软雅黑"/>
+                        </a:rPr>
+                        <a:t>RhineLabUI</a:t>
+                      </a:r>
+                    </a:p>
+                  </a:txBody>
+                  <a:tcPr/>
+                </a:tc>
+                <a:tc>
+                  <a:txBody>
+                    <a:bodyPr/>
+                    <a:lstStyle/>
+                    <a:p>
+                      <a:r>
+                        <a:rPr sz="950" b="0">
+                          <a:solidFill>
+                            <a:srgbClr val="6E675F"/>
+                          </a:solidFill>
+                          <a:latin typeface="微软雅黑"/>
+                        </a:rPr>
+                        <a:t>MIT</a:t>
+                      </a:r>
+                    </a:p>
+                  </a:txBody>
+                  <a:tcPr/>
+                </a:tc>
+                <a:tc>
+                  <a:txBody>
+                    <a:bodyPr/>
+                    <a:lstStyle/>
+                    <a:p>
+                      <a:r>
+                        <a:rPr sz="950" b="0">
+                          <a:solidFill>
+                            <a:srgbClr val="080A08"/>
+                          </a:solidFill>
+                          <a:latin typeface="微软雅黑"/>
+                        </a:rPr>
+                        <a:t>治理档案馆前端骨架</a:t>
+                      </a:r>
+                    </a:p>
+                  </a:txBody>
+                  <a:tcPr/>
+                </a:tc>
+                <a:tc>
+                  <a:txBody>
+                    <a:bodyPr/>
+                    <a:lstStyle/>
+                    <a:p>
+                      <a:r>
+                        <a:rPr sz="950" b="0">
+                          <a:solidFill>
+                            <a:srgbClr val="080A08"/>
+                          </a:solidFill>
+                          <a:latin typeface="微软雅黑"/>
+                        </a:rPr>
+                        <a:t>全量品牌换血（文字/字画/徽记重绘）、数据源接自有服务、画质策略调整</a:t>
+                      </a:r>
+                    </a:p>
+                  </a:txBody>
+                  <a:tcPr/>
+                </a:tc>
+              </a:tr>
+              <a:tr h="441960">
+                <a:tc>
+                  <a:txBody>
+                    <a:bodyPr/>
+                    <a:lstStyle/>
+                    <a:p>
+                      <a:r>
+                        <a:rPr sz="950" b="0">
+                          <a:solidFill>
+                            <a:srgbClr val="080A08"/>
+                          </a:solidFill>
+                          <a:latin typeface="微软雅黑"/>
+                        </a:rPr>
+                        <a:t>语料数据集（757,810 条）</a:t>
+                      </a:r>
+                    </a:p>
+                  </a:txBody>
+                  <a:tcPr/>
+                </a:tc>
+                <a:tc>
+                  <a:txBody>
+                    <a:bodyPr/>
+                    <a:lstStyle/>
+                    <a:p>
+                      <a:r>
+                        <a:rPr sz="950" b="0">
+                          <a:solidFill>
+                            <a:srgbClr val="6E675F"/>
+                          </a:solidFill>
+                          <a:latin typeface="微软雅黑"/>
+                        </a:rPr>
+                        <a:t>Apache-2.0</a:t>
+                      </a:r>
+                    </a:p>
+                  </a:txBody>
+                  <a:tcPr/>
+                </a:tc>
+                <a:tc>
+                  <a:txBody>
+                    <a:bodyPr/>
+                    <a:lstStyle/>
+                    <a:p>
+                      <a:r>
+                        <a:rPr sz="950" b="0">
+                          <a:solidFill>
+                            <a:srgbClr val="080A08"/>
+                          </a:solidFill>
+                          <a:latin typeface="微软雅黑"/>
+                        </a:rPr>
+                        <a:t>检索语料库</a:t>
+                      </a:r>
+                    </a:p>
+                  </a:txBody>
+                  <a:tcPr/>
+                </a:tc>
+                <a:tc>
+                  <a:txBody>
+                    <a:bodyPr/>
+                    <a:lstStyle/>
+                    <a:p>
+                      <a:r>
+                        <a:rPr sz="950" b="0">
+                          <a:solidFill>
+                            <a:srgbClr val="080A08"/>
+                          </a:solidFill>
+                          <a:latin typeface="微软雅黑"/>
+                        </a:rPr>
+                        <a:t>清洗、分块、索引；保留来源与许可声明</a:t>
+                      </a:r>
+                    </a:p>
+                  </a:txBody>
+                  <a:tcPr/>
+                </a:tc>
+              </a:tr>
+              <a:tr h="441960">
+                <a:tc>
+                  <a:txBody>
+                    <a:bodyPr/>
+                    <a:lstStyle/>
+                    <a:p>
+                      <a:r>
+                        <a:rPr sz="950" b="0">
+                          <a:solidFill>
+                            <a:srgbClr val="080A08"/>
+                          </a:solidFill>
+                          <a:latin typeface="微软雅黑"/>
+                        </a:rPr>
+                        <a:t>MiSans 字体</a:t>
+                      </a:r>
+                    </a:p>
+                  </a:txBody>
+                  <a:tcPr/>
+                </a:tc>
+                <a:tc>
+                  <a:txBody>
+                    <a:bodyPr/>
+                    <a:lstStyle/>
+                    <a:p>
+                      <a:r>
+                        <a:rPr sz="950" b="0">
+                          <a:solidFill>
+                            <a:srgbClr val="6E675F"/>
+                          </a:solidFill>
+                          <a:latin typeface="微软雅黑"/>
+                        </a:rPr>
+                        <a:t>免费商用许可</a:t>
+                      </a:r>
+                    </a:p>
+                  </a:txBody>
+                  <a:tcPr/>
+                </a:tc>
+                <a:tc>
+                  <a:txBody>
+                    <a:bodyPr/>
+                    <a:lstStyle/>
+                    <a:p>
+                      <a:r>
+                        <a:rPr sz="950" b="0">
+                          <a:solidFill>
+                            <a:srgbClr val="080A08"/>
+                          </a:solidFill>
+                          <a:latin typeface="微软雅黑"/>
+                        </a:rPr>
+                        <a:t>界面正文</a:t>
+                      </a:r>
+                    </a:p>
+                  </a:txBody>
+                  <a:tcPr/>
+                </a:tc>
+                <a:tc>
+                  <a:txBody>
+                    <a:bodyPr/>
+                    <a:lstStyle/>
+                    <a:p>
+                      <a:r>
+                        <a:rPr sz="950" b="0">
+                          <a:solidFill>
+                            <a:srgbClr val="080A08"/>
+                          </a:solidFill>
+                          <a:latin typeface="微软雅黑"/>
+                        </a:rPr>
+                        <a:t>无修改</a:t>
+                      </a:r>
+                    </a:p>
+                  </a:txBody>
+                  <a:tcPr/>
+                </a:tc>
+              </a:tr>
+              <a:tr h="441960">
+                <a:tc>
+                  <a:txBody>
+                    <a:bodyPr/>
+                    <a:lstStyle/>
+                    <a:p>
+                      <a:r>
+                        <a:rPr sz="950" b="0">
+                          <a:solidFill>
+                            <a:srgbClr val="080A08"/>
+                          </a:solidFill>
+                          <a:latin typeface="微软雅黑"/>
+                        </a:rPr>
+                        <a:t>设计方法论参考</a:t>
+                      </a:r>
+                    </a:p>
+                  </a:txBody>
+                  <a:tcPr/>
+                </a:tc>
+                <a:tc>
+                  <a:txBody>
+                    <a:bodyPr/>
+                    <a:lstStyle/>
+                    <a:p>
+                      <a:r>
+                        <a:rPr sz="950" b="0">
+                          <a:solidFill>
+                            <a:srgbClr val="6E675F"/>
+                          </a:solidFill>
+                          <a:latin typeface="微软雅黑"/>
+                        </a:rPr>
+                        <a:t>—（方法论不受版权保护）</a:t>
+                      </a:r>
+                    </a:p>
+                  </a:txBody>
+                  <a:tcPr/>
+                </a:tc>
+                <a:tc>
+                  <a:txBody>
+                    <a:bodyPr/>
+                    <a:lstStyle/>
+                    <a:p>
+                      <a:r>
+                        <a:rPr sz="950" b="0">
+                          <a:solidFill>
+                            <a:srgbClr val="080A08"/>
+                          </a:solidFill>
+                          <a:latin typeface="微软雅黑"/>
+                        </a:rPr>
+                        <a:t>DESIGN.md 工作流</a:t>
+                      </a:r>
+                    </a:p>
+                  </a:txBody>
+                  <a:tcPr/>
+                </a:tc>
+                <a:tc>
+                  <a:txBody>
+                    <a:bodyPr/>
+                    <a:lstStyle/>
+                    <a:p>
+                      <a:r>
+                        <a:rPr sz="950" b="0">
+                          <a:solidFill>
+                            <a:srgbClr val="080A08"/>
+                          </a:solidFill>
+                          <a:latin typeface="微软雅黑"/>
+                        </a:rPr>
+                        <a:t>仅借鉴方法，未复制内容</a:t>
+                      </a:r>
+                    </a:p>
+                  </a:txBody>
+                  <a:tcPr/>
+                </a:tc>
+              </a:tr>
+            </a:tbl>
+          </a:graphicData>
+        </a:graphic>
+      </p:graphicFrame>
+      <p:sp>
+        <p:nvSpPr>
+          <p:cNvPr id="5" name="TextBox 4"/>
+          <p:cNvSpPr txBox="1"/>
+          <p:nvPr/>
+        </p:nvSpPr>
+        <p:spPr>
+          <a:xfrm>
+            <a:off x="640080" y="4160520"/>
+            <a:ext cx="10972800" cy="274320"/>
+          </a:xfrm>
+          <a:prstGeom prst="rect">
+            <a:avLst/>
+          </a:prstGeom>
+          <a:noFill/>
+        </p:spPr>
+        <p:txBody>
+          <a:bodyPr wrap="square">
+            <a:spAutoFit/>
+          </a:bodyPr>
+          <a:lstStyle/>
+          <a:p>
+            <a:r>
+              <a:rPr sz="1300" b="1">
+                <a:solidFill>
+                  <a:srgbClr val="9B7247"/>
+                </a:solidFill>
+                <a:latin typeface="微软雅黑"/>
+              </a:rPr>
+              <a:t>自主贡献（核心资产均为原创）</a:t>
+            </a:r>
+          </a:p>
+        </p:txBody>
+      </p:sp>
+      <p:sp>
+        <p:nvSpPr>
+          <p:cNvPr id="6" name="TextBox 5"/>
+          <p:cNvSpPr txBox="1"/>
+          <p:nvPr/>
+        </p:nvSpPr>
+        <p:spPr>
+          <a:xfrm>
+            <a:off x="640080" y="4480560"/>
+            <a:ext cx="10972800" cy="914400"/>
+          </a:xfrm>
+          <a:prstGeom prst="rect">
+            <a:avLst/>
+          </a:prstGeom>
+          <a:noFill/>
+        </p:spPr>
+        <p:txBody>
+          <a:bodyPr wrap="square">
+            <a:spAutoFit/>
+          </a:bodyPr>
+          <a:lstStyle/>
+          <a:p>
+            <a:r>
+              <a:rPr sz="1050" b="0">
+                <a:solidFill>
+                  <a:srgbClr val="080A08"/>
+                </a:solidFill>
+                <a:latin typeface="微软雅黑"/>
+              </a:rPr>
+              <a:t>· 五层冻结基准：R/M/X/C/G 五层评测（R hit@10 1.00 · MRR 0.8494 · M 24/25 · C/G 25/25），118/118 测试通过</a:t>
+            </a:r>
+          </a:p>
+          <a:p>
+            <a:r>
+              <a:rPr sz="1050" b="0">
+                <a:solidFill>
+                  <a:srgbClr val="080A08"/>
+                </a:solidFill>
+                <a:latin typeface="微软雅黑"/>
+              </a:rPr>
+              <a:t>· 治理账本：10 条上链决策记录，配对门控消融（A2）自动裁决：M/X FAIL → 冠军维持 τ=0.8505，不虚报 promote</a:t>
+            </a:r>
+          </a:p>
+          <a:p>
+            <a:r>
+              <a:rPr sz="1050" b="0">
+                <a:solidFill>
+                  <a:srgbClr val="080A08"/>
+                </a:solidFill>
+                <a:latin typeface="微软雅黑"/>
+              </a:rPr>
+              <a:t>· 满库自洽链：断点续跑导入 → 冷却 → 全量重放（20261030-1118，MRR 0.8494→0.8711）→ 门控落账，无人值守</a:t>
+            </a:r>
+          </a:p>
+          <a:p>
+            <a:r>
+              <a:rPr sz="1050" b="0">
+                <a:solidFill>
+                  <a:srgbClr val="080A08"/>
+                </a:solidFill>
+                <a:latin typeface="微软雅黑"/>
+              </a:rPr>
+              <a:t>· 档案馆换血工艺：字形级品牌重建（单字母矢量画稿库），零第三方 IP 残留</a:t>
+            </a:r>
+          </a:p>
+        </p:txBody>
+      </p:sp>
+      <p:sp>
+        <p:nvSpPr>
+          <p:cNvPr id="7" name="TextBox 6"/>
+          <p:cNvSpPr txBox="1"/>
+          <p:nvPr/>
+        </p:nvSpPr>
+        <p:spPr>
+          <a:xfrm>
+            <a:off x="640080" y="5623560"/>
+            <a:ext cx="10972800" cy="274320"/>
+          </a:xfrm>
+          <a:prstGeom prst="rect">
+            <a:avLst/>
+          </a:prstGeom>
+          <a:noFill/>
+        </p:spPr>
+        <p:txBody>
+          <a:bodyPr wrap="square">
+            <a:spAutoFit/>
+          </a:bodyPr>
+          <a:lstStyle/>
+          <a:p>
+            <a:r>
+              <a:rPr sz="1300" b="1">
+                <a:solidFill>
+                  <a:srgbClr val="9B7247"/>
+                </a:solidFill>
+                <a:latin typeface="微软雅黑"/>
+              </a:rPr>
+              <a:t>合规红线</a:t>
+            </a:r>
+          </a:p>
+        </p:txBody>
+      </p:sp>
+      <p:sp>
+        <p:nvSpPr>
+          <p:cNvPr id="8" name="TextBox 7"/>
+          <p:cNvSpPr txBox="1"/>
+          <p:nvPr/>
+        </p:nvSpPr>
+        <p:spPr>
+          <a:xfrm>
+            <a:off x="640080" y="5943600"/>
+            <a:ext cx="10241280" cy="640080"/>
+          </a:xfrm>
+          <a:prstGeom prst="rect">
+            <a:avLst/>
+          </a:prstGeom>
+          <a:noFill/>
+        </p:spPr>
+        <p:txBody>
+          <a:bodyPr wrap="square">
+            <a:spAutoFit/>
+          </a:bodyPr>
+          <a:lstStyle/>
+          <a:p>
+            <a:r>
+              <a:rPr sz="950" b="0">
+                <a:solidFill>
+                  <a:srgbClr val="6E675F"/>
+                </a:solidFill>
+                <a:latin typeface="微软雅黑"/>
+              </a:rPr>
+              <a:t>· 不使用任何第三方未授权美术资产、商标或角色形象 · AGPL 项目仅借鉴交互机制思路，未复制任何源码</a:t>
+            </a:r>
+          </a:p>
+          <a:p>
+            <a:r>
+              <a:rPr sz="950" b="0">
+                <a:solidFill>
+                  <a:srgbClr val="6E675F"/>
+                </a:solidFill>
+                <a:latin typeface="微软雅黑"/>
+              </a:rPr>
+              <a:t>· Apache-2.0 语料的署名与 NOTICE 义务已履行 · 引用的学术结论均可现场复跑脚本验证</a:t>
+            </a:r>
+          </a:p>
+        </p:txBody>
+      </p:sp>
+      <p:sp>
+        <p:nvSpPr>
+          <p:cNvPr id="9" name="TextBox 8"/>
+          <p:cNvSpPr txBox="1"/>
+          <p:nvPr/>
+        </p:nvSpPr>
+        <p:spPr>
+          <a:xfrm>
+            <a:off x="10515600" y="6400800"/>
+            <a:ext cx="1371600" cy="274320"/>
+          </a:xfrm>
+          <a:prstGeom prst="rect">
+            <a:avLst/>
+          </a:prstGeom>
+          <a:noFill/>
+        </p:spPr>
+        <p:txBody>
+          <a:bodyPr wrap="square">
+            <a:spAutoFit/>
+          </a:bodyPr>
+          <a:lstStyle/>
+          <a:p>
+            <a:r>
+              <a:rPr sz="1000" b="0">
+                <a:solidFill>
+                  <a:srgbClr val="6E675F"/>
+                </a:solidFill>
+                <a:latin typeface="微软雅黑"/>
+              </a:rPr>
+              <a:t>13 / 13</a:t>
             </a:r>
           </a:p>
         </p:txBody>
@@ -6797,6 +7581,14 @@
 <file path=ppt/slides/slide2.xml><?xml version="1.0" encoding="utf-8"?>
 <p:sld xmlns:a="http://schemas.openxmlformats.org/drawingml/2006/main" xmlns:p="http://schemas.openxmlformats.org/presentationml/2006/main" xmlns:r="http://schemas.openxmlformats.org/officeDocument/2006/relationships">
   <p:cSld>
+    <p:bg>
+      <p:bgPr>
+        <a:solidFill>
+          <a:srgbClr val="EFEDE9"/>
+        </a:solidFill>
+        <a:effectLst/>
+      </p:bgPr>
+    </p:bg>
     <p:spTree>
       <p:nvGrpSpPr>
         <p:cNvPr id="1" name=""/>
@@ -6830,7 +7622,7 @@
             <a:r>
               <a:rPr sz="2800" b="1">
                 <a:solidFill>
-                  <a:srgbClr val="0A1E3D"/>
+                  <a:srgbClr val="080A08"/>
                 </a:solidFill>
                 <a:latin typeface="微软雅黑"/>
                 <a:ea typeface="微软雅黑"/>
@@ -6867,7 +7659,7 @@
             <a:r>
               <a:rPr sz="1000" b="0">
                 <a:solidFill>
-                  <a:srgbClr val="6B7B8D"/>
+                  <a:srgbClr val="6E675F"/>
                 </a:solidFill>
                 <a:latin typeface="微软雅黑"/>
                 <a:ea typeface="微软雅黑"/>
@@ -6893,7 +7685,7 @@
             <a:avLst/>
           </a:prstGeom>
           <a:solidFill>
-            <a:srgbClr val="DEE5EF"/>
+            <a:srgbClr val="E6DFD4"/>
           </a:solidFill>
           <a:ln>
             <a:noFill/>
@@ -6933,7 +7725,7 @@
             <a:r>
               <a:rPr sz="4000" b="1">
                 <a:solidFill>
-                  <a:srgbClr val="C77D0A"/>
+                  <a:srgbClr val="8A6234"/>
                 </a:solidFill>
                 <a:latin typeface="微软雅黑"/>
                 <a:ea typeface="微软雅黑"/>
@@ -6970,7 +7762,7 @@
             <a:r>
               <a:rPr sz="1300" b="0">
                 <a:solidFill>
-                  <a:srgbClr val="6B7B8D"/>
+                  <a:srgbClr val="6E675F"/>
                 </a:solidFill>
                 <a:latin typeface="微软雅黑"/>
                 <a:ea typeface="微软雅黑"/>
@@ -7007,7 +7799,7 @@
             <a:r>
               <a:rPr sz="1150" b="0">
                 <a:solidFill>
-                  <a:srgbClr val="0A1E3D"/>
+                  <a:srgbClr val="080A08"/>
                 </a:solidFill>
                 <a:latin typeface="微软雅黑"/>
                 <a:ea typeface="微软雅黑"/>
@@ -7044,7 +7836,7 @@
             <a:r>
               <a:rPr sz="4000" b="1">
                 <a:solidFill>
-                  <a:srgbClr val="C77D0A"/>
+                  <a:srgbClr val="8A6234"/>
                 </a:solidFill>
                 <a:latin typeface="微软雅黑"/>
                 <a:ea typeface="微软雅黑"/>
@@ -7081,7 +7873,7 @@
             <a:r>
               <a:rPr sz="1300" b="0">
                 <a:solidFill>
-                  <a:srgbClr val="6B7B8D"/>
+                  <a:srgbClr val="6E675F"/>
                 </a:solidFill>
                 <a:latin typeface="微软雅黑"/>
                 <a:ea typeface="微软雅黑"/>
@@ -7118,7 +7910,7 @@
             <a:r>
               <a:rPr sz="1150" b="0">
                 <a:solidFill>
-                  <a:srgbClr val="0A1E3D"/>
+                  <a:srgbClr val="080A08"/>
                 </a:solidFill>
                 <a:latin typeface="微软雅黑"/>
                 <a:ea typeface="微软雅黑"/>
@@ -7155,7 +7947,7 @@
             <a:r>
               <a:rPr sz="4000" b="1">
                 <a:solidFill>
-                  <a:srgbClr val="C77D0A"/>
+                  <a:srgbClr val="8A6234"/>
                 </a:solidFill>
                 <a:latin typeface="微软雅黑"/>
                 <a:ea typeface="微软雅黑"/>
@@ -7192,7 +7984,7 @@
             <a:r>
               <a:rPr sz="1300" b="0">
                 <a:solidFill>
-                  <a:srgbClr val="6B7B8D"/>
+                  <a:srgbClr val="6E675F"/>
                 </a:solidFill>
                 <a:latin typeface="微软雅黑"/>
                 <a:ea typeface="微软雅黑"/>
@@ -7229,7 +8021,7 @@
             <a:r>
               <a:rPr sz="1150" b="0">
                 <a:solidFill>
-                  <a:srgbClr val="0A1E3D"/>
+                  <a:srgbClr val="080A08"/>
                 </a:solidFill>
                 <a:latin typeface="微软雅黑"/>
                 <a:ea typeface="微软雅黑"/>
@@ -7255,7 +8047,7 @@
             <a:avLst/>
           </a:prstGeom>
           <a:solidFill>
-            <a:srgbClr val="DEE5EF"/>
+            <a:srgbClr val="E6DFD4"/>
           </a:solidFill>
           <a:ln>
             <a:noFill/>
@@ -7295,7 +8087,7 @@
             <a:r>
               <a:rPr sz="1350" b="0">
                 <a:solidFill>
-                  <a:srgbClr val="0A1E3D"/>
+                  <a:srgbClr val="080A08"/>
                 </a:solidFill>
                 <a:latin typeface="微软雅黑"/>
                 <a:ea typeface="微软雅黑"/>
@@ -7329,17 +8121,8 @@
           </a:bodyPr>
           <a:lstStyle/>
           <a:p>
-            <a:pPr algn="r"/>
-            <a:r>
-              <a:rPr sz="1000" b="0">
-                <a:solidFill>
-                  <a:srgbClr val="6B7B8D"/>
-                </a:solidFill>
-                <a:latin typeface="微软雅黑"/>
-                <a:ea typeface="微软雅黑"/>
-                <a:cs typeface="微软雅黑"/>
-              </a:rPr>
-              <a:t>2 / 12</a:t>
+            <a:r>
+              <a:t>2 / 13</a:t>
             </a:r>
           </a:p>
         </p:txBody>
@@ -7355,6 +8138,14 @@
 <file path=ppt/slides/slide3.xml><?xml version="1.0" encoding="utf-8"?>
 <p:sld xmlns:a="http://schemas.openxmlformats.org/drawingml/2006/main" xmlns:p="http://schemas.openxmlformats.org/presentationml/2006/main" xmlns:r="http://schemas.openxmlformats.org/officeDocument/2006/relationships">
   <p:cSld>
+    <p:bg>
+      <p:bgPr>
+        <a:solidFill>
+          <a:srgbClr val="EFEDE9"/>
+        </a:solidFill>
+        <a:effectLst/>
+      </p:bgPr>
+    </p:bg>
     <p:spTree>
       <p:nvGrpSpPr>
         <p:cNvPr id="1" name=""/>
@@ -7388,7 +8179,7 @@
             <a:r>
               <a:rPr sz="2800" b="1">
                 <a:solidFill>
-                  <a:srgbClr val="0A1E3D"/>
+                  <a:srgbClr val="080A08"/>
                 </a:solidFill>
                 <a:latin typeface="微软雅黑"/>
                 <a:ea typeface="微软雅黑"/>
@@ -7425,7 +8216,7 @@
             <a:r>
               <a:rPr sz="1000" b="0">
                 <a:solidFill>
-                  <a:srgbClr val="6B7B8D"/>
+                  <a:srgbClr val="6E675F"/>
                 </a:solidFill>
                 <a:latin typeface="微软雅黑"/>
                 <a:ea typeface="微软雅黑"/>
@@ -7451,7 +8242,7 @@
             <a:avLst/>
           </a:prstGeom>
           <a:solidFill>
-            <a:srgbClr val="DEE5EF"/>
+            <a:srgbClr val="E6DFD4"/>
           </a:solidFill>
           <a:ln>
             <a:noFill/>
@@ -7465,24 +8256,345 @@
           </a:p>
         </p:txBody>
       </p:sp>
+      <p:sp>
+        <p:nvSpPr>
+          <p:cNvPr id="6" name="Rectangle 5"/>
+          <p:cNvSpPr/>
+          <p:nvPr/>
+        </p:nvSpPr>
+        <p:spPr>
+          <a:xfrm>
+            <a:off x="8092440" y="1783080"/>
+            <a:ext cx="82296" cy="82296"/>
+          </a:xfrm>
+          <a:prstGeom prst="rect">
+            <a:avLst/>
+          </a:prstGeom>
+          <a:solidFill>
+            <a:srgbClr val="C5A16B"/>
+          </a:solidFill>
+          <a:ln>
+            <a:noFill/>
+          </a:ln>
+        </p:spPr>
+        <p:txBody>
+          <a:bodyPr rtlCol="0" anchor="ctr"/>
+          <a:lstStyle/>
+          <a:p>
+            <a:pPr algn="ctr"/>
+          </a:p>
+        </p:txBody>
+      </p:sp>
+      <p:sp>
+        <p:nvSpPr>
+          <p:cNvPr id="7" name="TextBox 6"/>
+          <p:cNvSpPr txBox="1"/>
+          <p:nvPr/>
+        </p:nvSpPr>
+        <p:spPr>
+          <a:xfrm>
+            <a:off x="8311896" y="1691640"/>
+            <a:ext cx="3300984" cy="960120"/>
+          </a:xfrm>
+          <a:prstGeom prst="rect">
+            <a:avLst/>
+          </a:prstGeom>
+          <a:noFill/>
+        </p:spPr>
+        <p:txBody>
+          <a:bodyPr wrap="square">
+            <a:spAutoFit/>
+          </a:bodyPr>
+          <a:lstStyle/>
+          <a:p>
+            <a:pPr algn="l"/>
+            <a:r>
+              <a:rPr sz="1150" b="0">
+                <a:solidFill>
+                  <a:srgbClr val="080A08"/>
+                </a:solidFill>
+                <a:latin typeface="微软雅黑"/>
+                <a:ea typeface="微软雅黑"/>
+                <a:cs typeface="微软雅黑"/>
+              </a:rPr>
+              <a:t>宿主侧自建 2 套 MCP（6 个工具），经 Nexent MCP 网关注册</a:t>
+            </a:r>
+          </a:p>
+        </p:txBody>
+      </p:sp>
+      <p:sp>
+        <p:nvSpPr>
+          <p:cNvPr id="8" name="Rectangle 7"/>
+          <p:cNvSpPr/>
+          <p:nvPr/>
+        </p:nvSpPr>
+        <p:spPr>
+          <a:xfrm>
+            <a:off x="8092440" y="2743200"/>
+            <a:ext cx="82296" cy="82296"/>
+          </a:xfrm>
+          <a:prstGeom prst="rect">
+            <a:avLst/>
+          </a:prstGeom>
+          <a:solidFill>
+            <a:srgbClr val="C5A16B"/>
+          </a:solidFill>
+          <a:ln>
+            <a:noFill/>
+          </a:ln>
+        </p:spPr>
+        <p:txBody>
+          <a:bodyPr rtlCol="0" anchor="ctr"/>
+          <a:lstStyle/>
+          <a:p>
+            <a:pPr algn="ctr"/>
+          </a:p>
+        </p:txBody>
+      </p:sp>
+      <p:sp>
+        <p:nvSpPr>
+          <p:cNvPr id="9" name="TextBox 8"/>
+          <p:cNvSpPr txBox="1"/>
+          <p:nvPr/>
+        </p:nvSpPr>
+        <p:spPr>
+          <a:xfrm>
+            <a:off x="8311896" y="2651760"/>
+            <a:ext cx="3300984" cy="960120"/>
+          </a:xfrm>
+          <a:prstGeom prst="rect">
+            <a:avLst/>
+          </a:prstGeom>
+          <a:noFill/>
+        </p:spPr>
+        <p:txBody>
+          <a:bodyPr wrap="square">
+            <a:spAutoFit/>
+          </a:bodyPr>
+          <a:lstStyle/>
+          <a:p>
+            <a:pPr algn="l"/>
+            <a:r>
+              <a:rPr sz="1150" b="0">
+                <a:solidFill>
+                  <a:srgbClr val="080A08"/>
+                </a:solidFill>
+                <a:latin typeface="微软雅黑"/>
+                <a:ea typeface="微软雅黑"/>
+                <a:cs typeface="微软雅黑"/>
+              </a:rPr>
+              <a:t>2 个自建 Skill 定义编排流程与拒答闸门</a:t>
+            </a:r>
+          </a:p>
+        </p:txBody>
+      </p:sp>
+      <p:sp>
+        <p:nvSpPr>
+          <p:cNvPr id="10" name="Rectangle 9"/>
+          <p:cNvSpPr/>
+          <p:nvPr/>
+        </p:nvSpPr>
+        <p:spPr>
+          <a:xfrm>
+            <a:off x="8092440" y="3703320"/>
+            <a:ext cx="82296" cy="82296"/>
+          </a:xfrm>
+          <a:prstGeom prst="rect">
+            <a:avLst/>
+          </a:prstGeom>
+          <a:solidFill>
+            <a:srgbClr val="C5A16B"/>
+          </a:solidFill>
+          <a:ln>
+            <a:noFill/>
+          </a:ln>
+        </p:spPr>
+        <p:txBody>
+          <a:bodyPr rtlCol="0" anchor="ctr"/>
+          <a:lstStyle/>
+          <a:p>
+            <a:pPr algn="ctr"/>
+          </a:p>
+        </p:txBody>
+      </p:sp>
+      <p:sp>
+        <p:nvSpPr>
+          <p:cNvPr id="11" name="TextBox 10"/>
+          <p:cNvSpPr txBox="1"/>
+          <p:nvPr/>
+        </p:nvSpPr>
+        <p:spPr>
+          <a:xfrm>
+            <a:off x="8311896" y="3611880"/>
+            <a:ext cx="3300984" cy="960120"/>
+          </a:xfrm>
+          <a:prstGeom prst="rect">
+            <a:avLst/>
+          </a:prstGeom>
+          <a:noFill/>
+        </p:spPr>
+        <p:txBody>
+          <a:bodyPr wrap="square">
+            <a:spAutoFit/>
+          </a:bodyPr>
+          <a:lstStyle/>
+          <a:p>
+            <a:pPr algn="l"/>
+            <a:r>
+              <a:rPr sz="1150" b="0">
+                <a:solidFill>
+                  <a:srgbClr val="080A08"/>
+                </a:solidFill>
+                <a:latin typeface="微软雅黑"/>
+                <a:ea typeface="微软雅黑"/>
+                <a:cs typeface="微软雅黑"/>
+              </a:rPr>
+              <a:t>本体三层：规则层召回 → 推理层连链 → 模型判定层判真假</a:t>
+            </a:r>
+          </a:p>
+        </p:txBody>
+      </p:sp>
+      <p:sp>
+        <p:nvSpPr>
+          <p:cNvPr id="12" name="Rectangle 11"/>
+          <p:cNvSpPr/>
+          <p:nvPr/>
+        </p:nvSpPr>
+        <p:spPr>
+          <a:xfrm>
+            <a:off x="8092440" y="4663440"/>
+            <a:ext cx="82296" cy="82296"/>
+          </a:xfrm>
+          <a:prstGeom prst="rect">
+            <a:avLst/>
+          </a:prstGeom>
+          <a:solidFill>
+            <a:srgbClr val="C5A16B"/>
+          </a:solidFill>
+          <a:ln>
+            <a:noFill/>
+          </a:ln>
+        </p:spPr>
+        <p:txBody>
+          <a:bodyPr rtlCol="0" anchor="ctr"/>
+          <a:lstStyle/>
+          <a:p>
+            <a:pPr algn="ctr"/>
+          </a:p>
+        </p:txBody>
+      </p:sp>
+      <p:sp>
+        <p:nvSpPr>
+          <p:cNvPr id="13" name="TextBox 12"/>
+          <p:cNvSpPr txBox="1"/>
+          <p:nvPr/>
+        </p:nvSpPr>
+        <p:spPr>
+          <a:xfrm>
+            <a:off x="8311896" y="4572000"/>
+            <a:ext cx="3300984" cy="960120"/>
+          </a:xfrm>
+          <a:prstGeom prst="rect">
+            <a:avLst/>
+          </a:prstGeom>
+          <a:noFill/>
+        </p:spPr>
+        <p:txBody>
+          <a:bodyPr wrap="square">
+            <a:spAutoFit/>
+          </a:bodyPr>
+          <a:lstStyle/>
+          <a:p>
+            <a:pPr algn="l"/>
+            <a:r>
+              <a:rPr sz="1150" b="0">
+                <a:solidFill>
+                  <a:srgbClr val="080A08"/>
+                </a:solidFill>
+                <a:latin typeface="微软雅黑"/>
+                <a:ea typeface="微软雅黑"/>
+                <a:cs typeface="微软雅黑"/>
+              </a:rPr>
+              <a:t>回答逐条给出 chunk_id，可回原文核对</a:t>
+            </a:r>
+          </a:p>
+        </p:txBody>
+      </p:sp>
+      <p:sp>
+        <p:nvSpPr>
+          <p:cNvPr id="14" name="TextBox 13"/>
+          <p:cNvSpPr txBox="1"/>
+          <p:nvPr/>
+        </p:nvSpPr>
+        <p:spPr>
+          <a:xfrm>
+            <a:off x="10515600" y="6400800"/>
+            <a:ext cx="1371600" cy="274320"/>
+          </a:xfrm>
+          <a:prstGeom prst="rect">
+            <a:avLst/>
+          </a:prstGeom>
+          <a:noFill/>
+        </p:spPr>
+        <p:txBody>
+          <a:bodyPr wrap="square">
+            <a:spAutoFit/>
+          </a:bodyPr>
+          <a:lstStyle/>
+          <a:p>
+            <a:r>
+              <a:t>3 / 13</a:t>
+            </a:r>
+          </a:p>
+        </p:txBody>
+      </p:sp>
+      <p:sp>
+        <p:nvSpPr>
+          <p:cNvPr id="15" name="TextBox 14"/>
+          <p:cNvSpPr txBox="1"/>
+          <p:nvPr/>
+        </p:nvSpPr>
+        <p:spPr>
+          <a:xfrm>
+            <a:off x="594359" y="1508760"/>
+            <a:ext cx="6126479" cy="4389120"/>
+          </a:xfrm>
+          <a:prstGeom prst="rect">
+            <a:avLst/>
+          </a:prstGeom>
+          <a:noFill/>
+          <a:ln w="15875">
+            <a:solidFill>
+              <a:srgbClr val="9B7247"/>
+            </a:solidFill>
+          </a:ln>
+        </p:spPr>
+        <p:txBody>
+          <a:bodyPr wrap="none">
+            <a:spAutoFit/>
+          </a:bodyPr>
+          <a:lstStyle/>
+          <a:p/>
+        </p:txBody>
+      </p:sp>
       <p:pic>
         <p:nvPicPr>
-          <p:cNvPr id="5" name="Picture 4" descr="nexent-callgraph.png"/>
+          <p:cNvPr id="16" name="Picture 15" descr="ppt-p3-callgraph-editorial.png"/>
           <p:cNvPicPr>
             <a:picLocks noChangeAspect="1"/>
           </p:cNvPicPr>
           <p:nvPr/>
         </p:nvPicPr>
         <p:blipFill>
-          <a:blip r:embed="rId2"/>
+          <a:blip r:embed="rId3"/>
           <a:stretch>
             <a:fillRect/>
           </a:stretch>
         </p:blipFill>
         <p:spPr>
           <a:xfrm>
-            <a:off x="594360" y="1572768"/>
-            <a:ext cx="6035040" cy="4310743"/>
+            <a:off x="640080" y="1554480"/>
+            <a:ext cx="6766560" cy="4297680"/>
           </a:xfrm>
           <a:prstGeom prst="rect">
             <a:avLst/>
@@ -7491,301 +8603,68 @@
       </p:pic>
       <p:sp>
         <p:nvSpPr>
-          <p:cNvPr id="6" name="Rectangle 5"/>
-          <p:cNvSpPr/>
-          <p:nvPr/>
-        </p:nvSpPr>
-        <p:spPr>
-          <a:xfrm>
-            <a:off x="8092440" y="1783080"/>
-            <a:ext cx="82296" cy="82296"/>
+          <p:cNvPr id="17" name="TextBox 16"/>
+          <p:cNvSpPr txBox="1"/>
+          <p:nvPr/>
+        </p:nvSpPr>
+        <p:spPr>
+          <a:xfrm>
+            <a:off x="594360" y="1508760"/>
+            <a:ext cx="6858000" cy="4389120"/>
+          </a:xfrm>
+          <a:prstGeom prst="rect">
+            <a:avLst/>
+          </a:prstGeom>
+          <a:noFill/>
+          <a:ln w="15875">
+            <a:solidFill>
+              <a:srgbClr val="9B7247"/>
+            </a:solidFill>
+          </a:ln>
+        </p:spPr>
+        <p:txBody>
+          <a:bodyPr wrap="none">
+            <a:spAutoFit/>
+          </a:bodyPr>
+          <a:lstStyle/>
+          <a:p/>
+        </p:txBody>
+      </p:sp>
+      <p:sp>
+        <p:nvSpPr>
+          <p:cNvPr id="18" name="TextBox 17"/>
+          <p:cNvSpPr txBox="1"/>
+          <p:nvPr/>
+        </p:nvSpPr>
+        <p:spPr>
+          <a:xfrm>
+            <a:off x="640080" y="5888736"/>
+            <a:ext cx="6766560" cy="256032"/>
           </a:xfrm>
           <a:prstGeom prst="rect">
             <a:avLst/>
           </a:prstGeom>
           <a:solidFill>
-            <a:srgbClr val="0096C7"/>
+            <a:srgbClr val="E6DFD4"/>
           </a:solidFill>
           <a:ln>
             <a:noFill/>
           </a:ln>
         </p:spPr>
         <p:txBody>
-          <a:bodyPr rtlCol="0" anchor="ctr"/>
-          <a:lstStyle/>
-          <a:p>
-            <a:pPr algn="ctr"/>
-          </a:p>
-        </p:txBody>
-      </p:sp>
-      <p:sp>
-        <p:nvSpPr>
-          <p:cNvPr id="7" name="TextBox 6"/>
-          <p:cNvSpPr txBox="1"/>
-          <p:nvPr/>
-        </p:nvSpPr>
-        <p:spPr>
-          <a:xfrm>
-            <a:off x="8311896" y="1691640"/>
-            <a:ext cx="3300984" cy="960120"/>
-          </a:xfrm>
-          <a:prstGeom prst="rect">
-            <a:avLst/>
-          </a:prstGeom>
-          <a:noFill/>
-        </p:spPr>
-        <p:txBody>
-          <a:bodyPr wrap="square">
-            <a:spAutoFit/>
-          </a:bodyPr>
-          <a:lstStyle/>
-          <a:p>
-            <a:pPr algn="l"/>
-            <a:r>
-              <a:rPr sz="1150" b="0">
-                <a:solidFill>
-                  <a:srgbClr val="0A1E3D"/>
-                </a:solidFill>
-                <a:latin typeface="微软雅黑"/>
-                <a:ea typeface="微软雅黑"/>
-                <a:cs typeface="微软雅黑"/>
-              </a:rPr>
-              <a:t>宿主侧自建 2 套 MCP（6 个工具），经 Nexent MCP 网关注册</a:t>
-            </a:r>
-          </a:p>
-        </p:txBody>
-      </p:sp>
-      <p:sp>
-        <p:nvSpPr>
-          <p:cNvPr id="8" name="Rectangle 7"/>
-          <p:cNvSpPr/>
-          <p:nvPr/>
-        </p:nvSpPr>
-        <p:spPr>
-          <a:xfrm>
-            <a:off x="8092440" y="2743200"/>
-            <a:ext cx="82296" cy="82296"/>
-          </a:xfrm>
-          <a:prstGeom prst="rect">
-            <a:avLst/>
-          </a:prstGeom>
-          <a:solidFill>
-            <a:srgbClr val="0096C7"/>
-          </a:solidFill>
-          <a:ln>
-            <a:noFill/>
-          </a:ln>
-        </p:spPr>
-        <p:txBody>
-          <a:bodyPr rtlCol="0" anchor="ctr"/>
-          <a:lstStyle/>
-          <a:p>
-            <a:pPr algn="ctr"/>
-          </a:p>
-        </p:txBody>
-      </p:sp>
-      <p:sp>
-        <p:nvSpPr>
-          <p:cNvPr id="9" name="TextBox 8"/>
-          <p:cNvSpPr txBox="1"/>
-          <p:nvPr/>
-        </p:nvSpPr>
-        <p:spPr>
-          <a:xfrm>
-            <a:off x="8311896" y="2651760"/>
-            <a:ext cx="3300984" cy="960120"/>
-          </a:xfrm>
-          <a:prstGeom prst="rect">
-            <a:avLst/>
-          </a:prstGeom>
-          <a:noFill/>
-        </p:spPr>
-        <p:txBody>
-          <a:bodyPr wrap="square">
-            <a:spAutoFit/>
-          </a:bodyPr>
-          <a:lstStyle/>
-          <a:p>
-            <a:pPr algn="l"/>
-            <a:r>
-              <a:rPr sz="1150" b="0">
-                <a:solidFill>
-                  <a:srgbClr val="0A1E3D"/>
-                </a:solidFill>
-                <a:latin typeface="微软雅黑"/>
-                <a:ea typeface="微软雅黑"/>
-                <a:cs typeface="微软雅黑"/>
-              </a:rPr>
-              <a:t>2 个自建 Skill 定义编排流程与拒答闸门</a:t>
-            </a:r>
-          </a:p>
-        </p:txBody>
-      </p:sp>
-      <p:sp>
-        <p:nvSpPr>
-          <p:cNvPr id="10" name="Rectangle 9"/>
-          <p:cNvSpPr/>
-          <p:nvPr/>
-        </p:nvSpPr>
-        <p:spPr>
-          <a:xfrm>
-            <a:off x="8092440" y="3703320"/>
-            <a:ext cx="82296" cy="82296"/>
-          </a:xfrm>
-          <a:prstGeom prst="rect">
-            <a:avLst/>
-          </a:prstGeom>
-          <a:solidFill>
-            <a:srgbClr val="0096C7"/>
-          </a:solidFill>
-          <a:ln>
-            <a:noFill/>
-          </a:ln>
-        </p:spPr>
-        <p:txBody>
-          <a:bodyPr rtlCol="0" anchor="ctr"/>
-          <a:lstStyle/>
-          <a:p>
-            <a:pPr algn="ctr"/>
-          </a:p>
-        </p:txBody>
-      </p:sp>
-      <p:sp>
-        <p:nvSpPr>
-          <p:cNvPr id="11" name="TextBox 10"/>
-          <p:cNvSpPr txBox="1"/>
-          <p:nvPr/>
-        </p:nvSpPr>
-        <p:spPr>
-          <a:xfrm>
-            <a:off x="8311896" y="3611880"/>
-            <a:ext cx="3300984" cy="960120"/>
-          </a:xfrm>
-          <a:prstGeom prst="rect">
-            <a:avLst/>
-          </a:prstGeom>
-          <a:noFill/>
-        </p:spPr>
-        <p:txBody>
-          <a:bodyPr wrap="square">
-            <a:spAutoFit/>
-          </a:bodyPr>
-          <a:lstStyle/>
-          <a:p>
-            <a:pPr algn="l"/>
-            <a:r>
-              <a:rPr sz="1150" b="0">
-                <a:solidFill>
-                  <a:srgbClr val="0A1E3D"/>
-                </a:solidFill>
-                <a:latin typeface="微软雅黑"/>
-                <a:ea typeface="微软雅黑"/>
-                <a:cs typeface="微软雅黑"/>
-              </a:rPr>
-              <a:t>本体三层：规则层召回 → 推理层连链 → 模型判定层判真假</a:t>
-            </a:r>
-          </a:p>
-        </p:txBody>
-      </p:sp>
-      <p:sp>
-        <p:nvSpPr>
-          <p:cNvPr id="12" name="Rectangle 11"/>
-          <p:cNvSpPr/>
-          <p:nvPr/>
-        </p:nvSpPr>
-        <p:spPr>
-          <a:xfrm>
-            <a:off x="8092440" y="4663440"/>
-            <a:ext cx="82296" cy="82296"/>
-          </a:xfrm>
-          <a:prstGeom prst="rect">
-            <a:avLst/>
-          </a:prstGeom>
-          <a:solidFill>
-            <a:srgbClr val="0096C7"/>
-          </a:solidFill>
-          <a:ln>
-            <a:noFill/>
-          </a:ln>
-        </p:spPr>
-        <p:txBody>
-          <a:bodyPr rtlCol="0" anchor="ctr"/>
-          <a:lstStyle/>
-          <a:p>
-            <a:pPr algn="ctr"/>
-          </a:p>
-        </p:txBody>
-      </p:sp>
-      <p:sp>
-        <p:nvSpPr>
-          <p:cNvPr id="13" name="TextBox 12"/>
-          <p:cNvSpPr txBox="1"/>
-          <p:nvPr/>
-        </p:nvSpPr>
-        <p:spPr>
-          <a:xfrm>
-            <a:off x="8311896" y="4572000"/>
-            <a:ext cx="3300984" cy="960120"/>
-          </a:xfrm>
-          <a:prstGeom prst="rect">
-            <a:avLst/>
-          </a:prstGeom>
-          <a:noFill/>
-        </p:spPr>
-        <p:txBody>
-          <a:bodyPr wrap="square">
-            <a:spAutoFit/>
-          </a:bodyPr>
-          <a:lstStyle/>
-          <a:p>
-            <a:pPr algn="l"/>
-            <a:r>
-              <a:rPr sz="1150" b="0">
-                <a:solidFill>
-                  <a:srgbClr val="0A1E3D"/>
-                </a:solidFill>
-                <a:latin typeface="微软雅黑"/>
-                <a:ea typeface="微软雅黑"/>
-                <a:cs typeface="微软雅黑"/>
-              </a:rPr>
-              <a:t>回答逐条给出 chunk_id，可回原文核对</a:t>
-            </a:r>
-          </a:p>
-        </p:txBody>
-      </p:sp>
-      <p:sp>
-        <p:nvSpPr>
-          <p:cNvPr id="14" name="TextBox 13"/>
-          <p:cNvSpPr txBox="1"/>
-          <p:nvPr/>
-        </p:nvSpPr>
-        <p:spPr>
-          <a:xfrm>
-            <a:off x="10515600" y="6400800"/>
-            <a:ext cx="1371600" cy="274320"/>
-          </a:xfrm>
-          <a:prstGeom prst="rect">
-            <a:avLst/>
-          </a:prstGeom>
-          <a:noFill/>
-        </p:spPr>
-        <p:txBody>
-          <a:bodyPr wrap="square">
-            <a:spAutoFit/>
-          </a:bodyPr>
-          <a:lstStyle/>
-          <a:p>
-            <a:pPr algn="r"/>
-            <a:r>
-              <a:rPr sz="1000" b="0">
-                <a:solidFill>
-                  <a:srgbClr val="6B7B8D"/>
-                </a:solidFill>
-                <a:latin typeface="微软雅黑"/>
-                <a:ea typeface="微软雅黑"/>
-                <a:cs typeface="微软雅黑"/>
-              </a:rPr>
-              <a:t>3 / 12</a:t>
+          <a:bodyPr wrap="none" lIns="73152" tIns="18288">
+            <a:spAutoFit/>
+          </a:bodyPr>
+          <a:lstStyle/>
+          <a:p>
+            <a:r>
+              <a:rPr sz="850">
+                <a:solidFill>
+                  <a:srgbClr val="6E675F"/>
+                </a:solidFill>
+                <a:latin typeface="微软雅黑"/>
+              </a:rPr>
+              <a:t>治理控制台 · 调用关系全图 · 自绘图版（编辑风格）</a:t>
             </a:r>
           </a:p>
         </p:txBody>
@@ -7801,6 +8680,14 @@
 <file path=ppt/slides/slide4.xml><?xml version="1.0" encoding="utf-8"?>
 <p:sld xmlns:a="http://schemas.openxmlformats.org/drawingml/2006/main" xmlns:p="http://schemas.openxmlformats.org/presentationml/2006/main" xmlns:r="http://schemas.openxmlformats.org/officeDocument/2006/relationships">
   <p:cSld>
+    <p:bg>
+      <p:bgPr>
+        <a:solidFill>
+          <a:srgbClr val="EFEDE9"/>
+        </a:solidFill>
+        <a:effectLst/>
+      </p:bgPr>
+    </p:bg>
     <p:spTree>
       <p:nvGrpSpPr>
         <p:cNvPr id="1" name=""/>
@@ -7834,7 +8721,7 @@
             <a:r>
               <a:rPr sz="2800" b="1">
                 <a:solidFill>
-                  <a:srgbClr val="0A1E3D"/>
+                  <a:srgbClr val="080A08"/>
                 </a:solidFill>
                 <a:latin typeface="微软雅黑"/>
                 <a:ea typeface="微软雅黑"/>
@@ -7871,7 +8758,7 @@
             <a:r>
               <a:rPr sz="1000" b="0">
                 <a:solidFill>
-                  <a:srgbClr val="6B7B8D"/>
+                  <a:srgbClr val="6E675F"/>
                 </a:solidFill>
                 <a:latin typeface="微软雅黑"/>
                 <a:ea typeface="微软雅黑"/>
@@ -7897,7 +8784,7 @@
             <a:avLst/>
           </a:prstGeom>
           <a:solidFill>
-            <a:srgbClr val="DEE5EF"/>
+            <a:srgbClr val="E6DFD4"/>
           </a:solidFill>
           <a:ln>
             <a:noFill/>
@@ -7911,24 +8798,316 @@
           </a:p>
         </p:txBody>
       </p:sp>
+      <p:sp>
+        <p:nvSpPr>
+          <p:cNvPr id="6" name="Rectangle 5"/>
+          <p:cNvSpPr/>
+          <p:nvPr/>
+        </p:nvSpPr>
+        <p:spPr>
+          <a:xfrm>
+            <a:off x="7726679" y="1737360"/>
+            <a:ext cx="82296" cy="82296"/>
+          </a:xfrm>
+          <a:prstGeom prst="rect">
+            <a:avLst/>
+          </a:prstGeom>
+          <a:solidFill>
+            <a:srgbClr val="C5A16B"/>
+          </a:solidFill>
+          <a:ln>
+            <a:noFill/>
+          </a:ln>
+        </p:spPr>
+        <p:txBody>
+          <a:bodyPr rtlCol="0" anchor="ctr"/>
+          <a:lstStyle/>
+          <a:p>
+            <a:pPr algn="ctr"/>
+          </a:p>
+        </p:txBody>
+      </p:sp>
+      <p:sp>
+        <p:nvSpPr>
+          <p:cNvPr id="7" name="TextBox 6"/>
+          <p:cNvSpPr txBox="1"/>
+          <p:nvPr/>
+        </p:nvSpPr>
+        <p:spPr>
+          <a:xfrm>
+            <a:off x="7946136" y="1645920"/>
+            <a:ext cx="3666744" cy="1051560"/>
+          </a:xfrm>
+          <a:prstGeom prst="rect">
+            <a:avLst/>
+          </a:prstGeom>
+          <a:noFill/>
+        </p:spPr>
+        <p:txBody>
+          <a:bodyPr wrap="square">
+            <a:spAutoFit/>
+          </a:bodyPr>
+          <a:lstStyle/>
+          <a:p>
+            <a:pPr algn="l"/>
+            <a:r>
+              <a:rPr sz="1100" b="0">
+                <a:solidFill>
+                  <a:srgbClr val="080A08"/>
+                </a:solidFill>
+                <a:latin typeface="微软雅黑"/>
+                <a:ea typeface="微软雅黑"/>
+                <a:cs typeface="微软雅黑"/>
+              </a:rPr>
+              <a:t>链条：河北省条例 2017 → 国办函〔2018〕46 号 → 国办函〔2019〕89 号 → 常州钟楼区人大决定 2020 → 国办发〔2022〕35 号</a:t>
+            </a:r>
+          </a:p>
+        </p:txBody>
+      </p:sp>
+      <p:sp>
+        <p:nvSpPr>
+          <p:cNvPr id="8" name="Rectangle 7"/>
+          <p:cNvSpPr/>
+          <p:nvPr/>
+        </p:nvSpPr>
+        <p:spPr>
+          <a:xfrm>
+            <a:off x="7726679" y="2788920"/>
+            <a:ext cx="82296" cy="82296"/>
+          </a:xfrm>
+          <a:prstGeom prst="rect">
+            <a:avLst/>
+          </a:prstGeom>
+          <a:solidFill>
+            <a:srgbClr val="C5A16B"/>
+          </a:solidFill>
+          <a:ln>
+            <a:noFill/>
+          </a:ln>
+        </p:spPr>
+        <p:txBody>
+          <a:bodyPr rtlCol="0" anchor="ctr"/>
+          <a:lstStyle/>
+          <a:p>
+            <a:pPr algn="ctr"/>
+          </a:p>
+        </p:txBody>
+      </p:sp>
+      <p:sp>
+        <p:nvSpPr>
+          <p:cNvPr id="9" name="TextBox 8"/>
+          <p:cNvSpPr txBox="1"/>
+          <p:nvPr/>
+        </p:nvSpPr>
+        <p:spPr>
+          <a:xfrm>
+            <a:off x="7946136" y="2697480"/>
+            <a:ext cx="3666744" cy="1051560"/>
+          </a:xfrm>
+          <a:prstGeom prst="rect">
+            <a:avLst/>
+          </a:prstGeom>
+          <a:noFill/>
+        </p:spPr>
+        <p:txBody>
+          <a:bodyPr wrap="square">
+            <a:spAutoFit/>
+          </a:bodyPr>
+          <a:lstStyle/>
+          <a:p>
+            <a:pPr algn="l"/>
+            <a:r>
+              <a:rPr sz="1100" b="0">
+                <a:solidFill>
+                  <a:srgbClr val="080A08"/>
+                </a:solidFill>
+                <a:latin typeface="微软雅黑"/>
+                <a:ea typeface="微软雅黑"/>
+                <a:cs typeface="微软雅黑"/>
+              </a:rPr>
+              <a:t>耗时 73.44 s，答案含引用块清单</a:t>
+            </a:r>
+          </a:p>
+        </p:txBody>
+      </p:sp>
+      <p:sp>
+        <p:nvSpPr>
+          <p:cNvPr id="10" name="Rectangle 9"/>
+          <p:cNvSpPr/>
+          <p:nvPr/>
+        </p:nvSpPr>
+        <p:spPr>
+          <a:xfrm>
+            <a:off x="7726679" y="3840479"/>
+            <a:ext cx="82296" cy="82296"/>
+          </a:xfrm>
+          <a:prstGeom prst="rect">
+            <a:avLst/>
+          </a:prstGeom>
+          <a:solidFill>
+            <a:srgbClr val="C5A16B"/>
+          </a:solidFill>
+          <a:ln>
+            <a:noFill/>
+          </a:ln>
+        </p:spPr>
+        <p:txBody>
+          <a:bodyPr rtlCol="0" anchor="ctr"/>
+          <a:lstStyle/>
+          <a:p>
+            <a:pPr algn="ctr"/>
+          </a:p>
+        </p:txBody>
+      </p:sp>
+      <p:sp>
+        <p:nvSpPr>
+          <p:cNvPr id="11" name="TextBox 10"/>
+          <p:cNvSpPr txBox="1"/>
+          <p:nvPr/>
+        </p:nvSpPr>
+        <p:spPr>
+          <a:xfrm>
+            <a:off x="7946136" y="3749039"/>
+            <a:ext cx="3666744" cy="1051560"/>
+          </a:xfrm>
+          <a:prstGeom prst="rect">
+            <a:avLst/>
+          </a:prstGeom>
+          <a:noFill/>
+        </p:spPr>
+        <p:txBody>
+          <a:bodyPr wrap="square">
+            <a:spAutoFit/>
+          </a:bodyPr>
+          <a:lstStyle/>
+          <a:p>
+            <a:pPr algn="l"/>
+            <a:r>
+              <a:rPr sz="1100" b="0">
+                <a:solidFill>
+                  <a:srgbClr val="080A08"/>
+                </a:solidFill>
+                <a:latin typeface="微软雅黑"/>
+                <a:ea typeface="微软雅黑"/>
+                <a:cs typeface="微软雅黑"/>
+              </a:rPr>
+              <a:t>每条引用均带 chunk_id，可回原文</a:t>
+            </a:r>
+          </a:p>
+        </p:txBody>
+      </p:sp>
+      <p:sp>
+        <p:nvSpPr>
+          <p:cNvPr id="12" name="Rectangle 11"/>
+          <p:cNvSpPr/>
+          <p:nvPr/>
+        </p:nvSpPr>
+        <p:spPr>
+          <a:xfrm>
+            <a:off x="7726679" y="4892040"/>
+            <a:ext cx="82296" cy="82296"/>
+          </a:xfrm>
+          <a:prstGeom prst="rect">
+            <a:avLst/>
+          </a:prstGeom>
+          <a:solidFill>
+            <a:srgbClr val="C5A16B"/>
+          </a:solidFill>
+          <a:ln>
+            <a:noFill/>
+          </a:ln>
+        </p:spPr>
+        <p:txBody>
+          <a:bodyPr rtlCol="0" anchor="ctr"/>
+          <a:lstStyle/>
+          <a:p>
+            <a:pPr algn="ctr"/>
+          </a:p>
+        </p:txBody>
+      </p:sp>
+      <p:sp>
+        <p:nvSpPr>
+          <p:cNvPr id="13" name="TextBox 12"/>
+          <p:cNvSpPr txBox="1"/>
+          <p:nvPr/>
+        </p:nvSpPr>
+        <p:spPr>
+          <a:xfrm>
+            <a:off x="7946136" y="4800600"/>
+            <a:ext cx="3666744" cy="1051560"/>
+          </a:xfrm>
+          <a:prstGeom prst="rect">
+            <a:avLst/>
+          </a:prstGeom>
+          <a:noFill/>
+        </p:spPr>
+        <p:txBody>
+          <a:bodyPr wrap="square">
+            <a:spAutoFit/>
+          </a:bodyPr>
+          <a:lstStyle/>
+          <a:p>
+            <a:pPr algn="l"/>
+            <a:r>
+              <a:rPr sz="1100" b="0">
+                <a:solidFill>
+                  <a:srgbClr val="080A08"/>
+                </a:solidFill>
+                <a:latin typeface="微软雅黑"/>
+                <a:ea typeface="微软雅黑"/>
+                <a:cs typeface="微软雅黑"/>
+              </a:rPr>
+              <a:t>自述证据边界，不外推</a:t>
+            </a:r>
+          </a:p>
+        </p:txBody>
+      </p:sp>
+      <p:sp>
+        <p:nvSpPr>
+          <p:cNvPr id="14" name="TextBox 13"/>
+          <p:cNvSpPr txBox="1"/>
+          <p:nvPr/>
+        </p:nvSpPr>
+        <p:spPr>
+          <a:xfrm>
+            <a:off x="10515600" y="6400800"/>
+            <a:ext cx="1371600" cy="274320"/>
+          </a:xfrm>
+          <a:prstGeom prst="rect">
+            <a:avLst/>
+          </a:prstGeom>
+          <a:noFill/>
+        </p:spPr>
+        <p:txBody>
+          <a:bodyPr wrap="square">
+            <a:spAutoFit/>
+          </a:bodyPr>
+          <a:lstStyle/>
+          <a:p>
+            <a:r>
+              <a:t>4 / 13</a:t>
+            </a:r>
+          </a:p>
+        </p:txBody>
+      </p:sp>
       <p:pic>
         <p:nvPicPr>
-          <p:cNvPr id="5" name="Picture 4" descr="09-ui-qa-cross-doc.png"/>
+          <p:cNvPr id="15" name="Picture 14" descr="p4-chain-table.png"/>
           <p:cNvPicPr>
             <a:picLocks noChangeAspect="1"/>
           </p:cNvPicPr>
           <p:nvPr/>
         </p:nvPicPr>
         <p:blipFill>
-          <a:blip r:embed="rId2"/>
+          <a:blip r:embed="rId3"/>
           <a:stretch>
             <a:fillRect/>
           </a:stretch>
         </p:blipFill>
         <p:spPr>
           <a:xfrm>
-            <a:off x="594360" y="1463040"/>
-            <a:ext cx="6858000" cy="4373350"/>
+            <a:off x="640080" y="1463040"/>
+            <a:ext cx="6858000" cy="4160520"/>
           </a:xfrm>
           <a:prstGeom prst="rect">
             <a:avLst/>
@@ -7937,301 +9116,68 @@
       </p:pic>
       <p:sp>
         <p:nvSpPr>
-          <p:cNvPr id="6" name="Rectangle 5"/>
-          <p:cNvSpPr/>
-          <p:nvPr/>
-        </p:nvSpPr>
-        <p:spPr>
-          <a:xfrm>
-            <a:off x="7726679" y="1737360"/>
-            <a:ext cx="82296" cy="82296"/>
+          <p:cNvPr id="16" name="TextBox 15"/>
+          <p:cNvSpPr txBox="1"/>
+          <p:nvPr/>
+        </p:nvSpPr>
+        <p:spPr>
+          <a:xfrm>
+            <a:off x="594360" y="1417320"/>
+            <a:ext cx="6949440" cy="4251960"/>
+          </a:xfrm>
+          <a:prstGeom prst="rect">
+            <a:avLst/>
+          </a:prstGeom>
+          <a:noFill/>
+          <a:ln w="15875">
+            <a:solidFill>
+              <a:srgbClr val="9B7247"/>
+            </a:solidFill>
+          </a:ln>
+        </p:spPr>
+        <p:txBody>
+          <a:bodyPr wrap="none">
+            <a:spAutoFit/>
+          </a:bodyPr>
+          <a:lstStyle/>
+          <a:p/>
+        </p:txBody>
+      </p:sp>
+      <p:sp>
+        <p:nvSpPr>
+          <p:cNvPr id="17" name="TextBox 16"/>
+          <p:cNvSpPr txBox="1"/>
+          <p:nvPr/>
+        </p:nvSpPr>
+        <p:spPr>
+          <a:xfrm>
+            <a:off x="640080" y="5669280"/>
+            <a:ext cx="6858000" cy="256032"/>
           </a:xfrm>
           <a:prstGeom prst="rect">
             <a:avLst/>
           </a:prstGeom>
           <a:solidFill>
-            <a:srgbClr val="0096C7"/>
+            <a:srgbClr val="E6DFD4"/>
           </a:solidFill>
           <a:ln>
             <a:noFill/>
           </a:ln>
         </p:spPr>
         <p:txBody>
-          <a:bodyPr rtlCol="0" anchor="ctr"/>
-          <a:lstStyle/>
-          <a:p>
-            <a:pPr algn="ctr"/>
-          </a:p>
-        </p:txBody>
-      </p:sp>
-      <p:sp>
-        <p:nvSpPr>
-          <p:cNvPr id="7" name="TextBox 6"/>
-          <p:cNvSpPr txBox="1"/>
-          <p:nvPr/>
-        </p:nvSpPr>
-        <p:spPr>
-          <a:xfrm>
-            <a:off x="7946136" y="1645920"/>
-            <a:ext cx="3666744" cy="1051560"/>
-          </a:xfrm>
-          <a:prstGeom prst="rect">
-            <a:avLst/>
-          </a:prstGeom>
-          <a:noFill/>
-        </p:spPr>
-        <p:txBody>
-          <a:bodyPr wrap="square">
-            <a:spAutoFit/>
-          </a:bodyPr>
-          <a:lstStyle/>
-          <a:p>
-            <a:pPr algn="l"/>
-            <a:r>
-              <a:rPr sz="1100" b="0">
-                <a:solidFill>
-                  <a:srgbClr val="0A1E3D"/>
-                </a:solidFill>
-                <a:latin typeface="微软雅黑"/>
-                <a:ea typeface="微软雅黑"/>
-                <a:cs typeface="微软雅黑"/>
-              </a:rPr>
-              <a:t>链条：河北省条例 2017 → 国办函〔2018〕46 号 → 国办函〔2019〕89 号 → 常州钟楼区人大决定 2020 → 国办发〔2022〕35 号</a:t>
-            </a:r>
-          </a:p>
-        </p:txBody>
-      </p:sp>
-      <p:sp>
-        <p:nvSpPr>
-          <p:cNvPr id="8" name="Rectangle 7"/>
-          <p:cNvSpPr/>
-          <p:nvPr/>
-        </p:nvSpPr>
-        <p:spPr>
-          <a:xfrm>
-            <a:off x="7726679" y="2788920"/>
-            <a:ext cx="82296" cy="82296"/>
-          </a:xfrm>
-          <a:prstGeom prst="rect">
-            <a:avLst/>
-          </a:prstGeom>
-          <a:solidFill>
-            <a:srgbClr val="0096C7"/>
-          </a:solidFill>
-          <a:ln>
-            <a:noFill/>
-          </a:ln>
-        </p:spPr>
-        <p:txBody>
-          <a:bodyPr rtlCol="0" anchor="ctr"/>
-          <a:lstStyle/>
-          <a:p>
-            <a:pPr algn="ctr"/>
-          </a:p>
-        </p:txBody>
-      </p:sp>
-      <p:sp>
-        <p:nvSpPr>
-          <p:cNvPr id="9" name="TextBox 8"/>
-          <p:cNvSpPr txBox="1"/>
-          <p:nvPr/>
-        </p:nvSpPr>
-        <p:spPr>
-          <a:xfrm>
-            <a:off x="7946136" y="2697480"/>
-            <a:ext cx="3666744" cy="1051560"/>
-          </a:xfrm>
-          <a:prstGeom prst="rect">
-            <a:avLst/>
-          </a:prstGeom>
-          <a:noFill/>
-        </p:spPr>
-        <p:txBody>
-          <a:bodyPr wrap="square">
-            <a:spAutoFit/>
-          </a:bodyPr>
-          <a:lstStyle/>
-          <a:p>
-            <a:pPr algn="l"/>
-            <a:r>
-              <a:rPr sz="1100" b="0">
-                <a:solidFill>
-                  <a:srgbClr val="0A1E3D"/>
-                </a:solidFill>
-                <a:latin typeface="微软雅黑"/>
-                <a:ea typeface="微软雅黑"/>
-                <a:cs typeface="微软雅黑"/>
-              </a:rPr>
-              <a:t>耗时 73.44 s，答案含引用块清单</a:t>
-            </a:r>
-          </a:p>
-        </p:txBody>
-      </p:sp>
-      <p:sp>
-        <p:nvSpPr>
-          <p:cNvPr id="10" name="Rectangle 9"/>
-          <p:cNvSpPr/>
-          <p:nvPr/>
-        </p:nvSpPr>
-        <p:spPr>
-          <a:xfrm>
-            <a:off x="7726679" y="3840479"/>
-            <a:ext cx="82296" cy="82296"/>
-          </a:xfrm>
-          <a:prstGeom prst="rect">
-            <a:avLst/>
-          </a:prstGeom>
-          <a:solidFill>
-            <a:srgbClr val="0096C7"/>
-          </a:solidFill>
-          <a:ln>
-            <a:noFill/>
-          </a:ln>
-        </p:spPr>
-        <p:txBody>
-          <a:bodyPr rtlCol="0" anchor="ctr"/>
-          <a:lstStyle/>
-          <a:p>
-            <a:pPr algn="ctr"/>
-          </a:p>
-        </p:txBody>
-      </p:sp>
-      <p:sp>
-        <p:nvSpPr>
-          <p:cNvPr id="11" name="TextBox 10"/>
-          <p:cNvSpPr txBox="1"/>
-          <p:nvPr/>
-        </p:nvSpPr>
-        <p:spPr>
-          <a:xfrm>
-            <a:off x="7946136" y="3749039"/>
-            <a:ext cx="3666744" cy="1051560"/>
-          </a:xfrm>
-          <a:prstGeom prst="rect">
-            <a:avLst/>
-          </a:prstGeom>
-          <a:noFill/>
-        </p:spPr>
-        <p:txBody>
-          <a:bodyPr wrap="square">
-            <a:spAutoFit/>
-          </a:bodyPr>
-          <a:lstStyle/>
-          <a:p>
-            <a:pPr algn="l"/>
-            <a:r>
-              <a:rPr sz="1100" b="0">
-                <a:solidFill>
-                  <a:srgbClr val="0A1E3D"/>
-                </a:solidFill>
-                <a:latin typeface="微软雅黑"/>
-                <a:ea typeface="微软雅黑"/>
-                <a:cs typeface="微软雅黑"/>
-              </a:rPr>
-              <a:t>每条引用均带 chunk_id，可回原文</a:t>
-            </a:r>
-          </a:p>
-        </p:txBody>
-      </p:sp>
-      <p:sp>
-        <p:nvSpPr>
-          <p:cNvPr id="12" name="Rectangle 11"/>
-          <p:cNvSpPr/>
-          <p:nvPr/>
-        </p:nvSpPr>
-        <p:spPr>
-          <a:xfrm>
-            <a:off x="7726679" y="4892040"/>
-            <a:ext cx="82296" cy="82296"/>
-          </a:xfrm>
-          <a:prstGeom prst="rect">
-            <a:avLst/>
-          </a:prstGeom>
-          <a:solidFill>
-            <a:srgbClr val="0096C7"/>
-          </a:solidFill>
-          <a:ln>
-            <a:noFill/>
-          </a:ln>
-        </p:spPr>
-        <p:txBody>
-          <a:bodyPr rtlCol="0" anchor="ctr"/>
-          <a:lstStyle/>
-          <a:p>
-            <a:pPr algn="ctr"/>
-          </a:p>
-        </p:txBody>
-      </p:sp>
-      <p:sp>
-        <p:nvSpPr>
-          <p:cNvPr id="13" name="TextBox 12"/>
-          <p:cNvSpPr txBox="1"/>
-          <p:nvPr/>
-        </p:nvSpPr>
-        <p:spPr>
-          <a:xfrm>
-            <a:off x="7946136" y="4800600"/>
-            <a:ext cx="3666744" cy="1051560"/>
-          </a:xfrm>
-          <a:prstGeom prst="rect">
-            <a:avLst/>
-          </a:prstGeom>
-          <a:noFill/>
-        </p:spPr>
-        <p:txBody>
-          <a:bodyPr wrap="square">
-            <a:spAutoFit/>
-          </a:bodyPr>
-          <a:lstStyle/>
-          <a:p>
-            <a:pPr algn="l"/>
-            <a:r>
-              <a:rPr sz="1100" b="0">
-                <a:solidFill>
-                  <a:srgbClr val="0A1E3D"/>
-                </a:solidFill>
-                <a:latin typeface="微软雅黑"/>
-                <a:ea typeface="微软雅黑"/>
-                <a:cs typeface="微软雅黑"/>
-              </a:rPr>
-              <a:t>自述证据边界，不外推</a:t>
-            </a:r>
-          </a:p>
-        </p:txBody>
-      </p:sp>
-      <p:sp>
-        <p:nvSpPr>
-          <p:cNvPr id="14" name="TextBox 13"/>
-          <p:cNvSpPr txBox="1"/>
-          <p:nvPr/>
-        </p:nvSpPr>
-        <p:spPr>
-          <a:xfrm>
-            <a:off x="10515600" y="6400800"/>
-            <a:ext cx="1371600" cy="274320"/>
-          </a:xfrm>
-          <a:prstGeom prst="rect">
-            <a:avLst/>
-          </a:prstGeom>
-          <a:noFill/>
-        </p:spPr>
-        <p:txBody>
-          <a:bodyPr wrap="square">
-            <a:spAutoFit/>
-          </a:bodyPr>
-          <a:lstStyle/>
-          <a:p>
-            <a:pPr algn="r"/>
-            <a:r>
-              <a:rPr sz="1000" b="0">
-                <a:solidFill>
-                  <a:srgbClr val="6B7B8D"/>
-                </a:solidFill>
-                <a:latin typeface="微软雅黑"/>
-                <a:ea typeface="微软雅黑"/>
-                <a:cs typeface="微软雅黑"/>
-              </a:rPr>
-              <a:t>4 / 12</a:t>
+          <a:bodyPr wrap="none" lIns="73152" tIns="18288">
+            <a:spAutoFit/>
+          </a:bodyPr>
+          <a:lstStyle/>
+          <a:p>
+            <a:r>
+              <a:rPr sz="850">
+                <a:solidFill>
+                  <a:srgbClr val="6E675F"/>
+                </a:solidFill>
+                <a:latin typeface="微软雅黑"/>
+              </a:rPr>
+              <a:t>生产通路实拍 · 平台原生界面 · 跨层级链条引用块（河北省条例 2017→国办发〔2022〕35 号）</a:t>
             </a:r>
           </a:p>
         </p:txBody>
@@ -8247,6 +9193,14 @@
 <file path=ppt/slides/slide5.xml><?xml version="1.0" encoding="utf-8"?>
 <p:sld xmlns:a="http://schemas.openxmlformats.org/drawingml/2006/main" xmlns:p="http://schemas.openxmlformats.org/presentationml/2006/main" xmlns:r="http://schemas.openxmlformats.org/officeDocument/2006/relationships">
   <p:cSld>
+    <p:bg>
+      <p:bgPr>
+        <a:solidFill>
+          <a:srgbClr val="EFEDE9"/>
+        </a:solidFill>
+        <a:effectLst/>
+      </p:bgPr>
+    </p:bg>
     <p:spTree>
       <p:nvGrpSpPr>
         <p:cNvPr id="1" name=""/>
@@ -8280,7 +9234,7 @@
             <a:r>
               <a:rPr sz="2800" b="1">
                 <a:solidFill>
-                  <a:srgbClr val="0A1E3D"/>
+                  <a:srgbClr val="080A08"/>
                 </a:solidFill>
                 <a:latin typeface="微软雅黑"/>
                 <a:ea typeface="微软雅黑"/>
@@ -8317,7 +9271,7 @@
             <a:r>
               <a:rPr sz="1000" b="0">
                 <a:solidFill>
-                  <a:srgbClr val="6B7B8D"/>
+                  <a:srgbClr val="6E675F"/>
                 </a:solidFill>
                 <a:latin typeface="微软雅黑"/>
                 <a:ea typeface="微软雅黑"/>
@@ -8343,7 +9297,7 @@
             <a:avLst/>
           </a:prstGeom>
           <a:solidFill>
-            <a:srgbClr val="DEE5EF"/>
+            <a:srgbClr val="E6DFD4"/>
           </a:solidFill>
           <a:ln>
             <a:noFill/>
@@ -8396,7 +9350,7 @@
             <a:avLst/>
           </a:prstGeom>
           <a:solidFill>
-            <a:srgbClr val="1E5AB8"/>
+            <a:srgbClr val="9B7247"/>
           </a:solidFill>
           <a:ln>
             <a:noFill/>
@@ -8462,7 +9416,7 @@
             <a:avLst/>
           </a:prstGeom>
           <a:solidFill>
-            <a:srgbClr val="1E5AB8"/>
+            <a:srgbClr val="9B7247"/>
           </a:solidFill>
           <a:ln>
             <a:noFill/>
@@ -8528,7 +9482,7 @@
             <a:avLst/>
           </a:prstGeom>
           <a:solidFill>
-            <a:srgbClr val="F0F4F8"/>
+            <a:srgbClr val="F7F4EE"/>
           </a:solidFill>
           <a:ln>
             <a:noFill/>
@@ -8568,7 +9522,7 @@
             <a:r>
               <a:rPr sz="1050" b="0">
                 <a:solidFill>
-                  <a:srgbClr val="0A1E3D"/>
+                  <a:srgbClr val="080A08"/>
                 </a:solidFill>
                 <a:latin typeface="微软雅黑"/>
                 <a:ea typeface="微软雅黑"/>
@@ -8594,7 +9548,7 @@
             <a:avLst/>
           </a:prstGeom>
           <a:solidFill>
-            <a:srgbClr val="F0F4F8"/>
+            <a:srgbClr val="F7F4EE"/>
           </a:solidFill>
           <a:ln>
             <a:noFill/>
@@ -8634,7 +9588,7 @@
             <a:r>
               <a:rPr sz="1050" b="0">
                 <a:solidFill>
-                  <a:srgbClr val="0A1E3D"/>
+                  <a:srgbClr val="080A08"/>
                 </a:solidFill>
                 <a:latin typeface="微软雅黑"/>
                 <a:ea typeface="微软雅黑"/>
@@ -8671,7 +9625,7 @@
             <a:r>
               <a:rPr sz="1050" b="0">
                 <a:solidFill>
-                  <a:srgbClr val="0A1E3D"/>
+                  <a:srgbClr val="080A08"/>
                 </a:solidFill>
                 <a:latin typeface="微软雅黑"/>
                 <a:ea typeface="微软雅黑"/>
@@ -8708,7 +9662,7 @@
             <a:r>
               <a:rPr sz="1050" b="0">
                 <a:solidFill>
-                  <a:srgbClr val="0A1E3D"/>
+                  <a:srgbClr val="080A08"/>
                 </a:solidFill>
                 <a:latin typeface="微软雅黑"/>
                 <a:ea typeface="微软雅黑"/>
@@ -8734,7 +9688,7 @@
             <a:avLst/>
           </a:prstGeom>
           <a:solidFill>
-            <a:srgbClr val="F0F4F8"/>
+            <a:srgbClr val="F7F4EE"/>
           </a:solidFill>
           <a:ln>
             <a:noFill/>
@@ -8774,7 +9728,7 @@
             <a:r>
               <a:rPr sz="1050" b="0">
                 <a:solidFill>
-                  <a:srgbClr val="0A1E3D"/>
+                  <a:srgbClr val="080A08"/>
                 </a:solidFill>
                 <a:latin typeface="微软雅黑"/>
                 <a:ea typeface="微软雅黑"/>
@@ -8800,7 +9754,7 @@
             <a:avLst/>
           </a:prstGeom>
           <a:solidFill>
-            <a:srgbClr val="F0F4F8"/>
+            <a:srgbClr val="F7F4EE"/>
           </a:solidFill>
           <a:ln>
             <a:noFill/>
@@ -8840,7 +9794,7 @@
             <a:r>
               <a:rPr sz="1050" b="0">
                 <a:solidFill>
-                  <a:srgbClr val="0A1E3D"/>
+                  <a:srgbClr val="080A08"/>
                 </a:solidFill>
                 <a:latin typeface="微软雅黑"/>
                 <a:ea typeface="微软雅黑"/>
@@ -8877,7 +9831,7 @@
             <a:r>
               <a:rPr sz="1050" b="0">
                 <a:solidFill>
-                  <a:srgbClr val="0A1E3D"/>
+                  <a:srgbClr val="080A08"/>
                 </a:solidFill>
                 <a:latin typeface="微软雅黑"/>
                 <a:ea typeface="微软雅黑"/>
@@ -8914,7 +9868,7 @@
             <a:r>
               <a:rPr sz="1050" b="0">
                 <a:solidFill>
-                  <a:srgbClr val="0A1E3D"/>
+                  <a:srgbClr val="080A08"/>
                 </a:solidFill>
                 <a:latin typeface="微软雅黑"/>
                 <a:ea typeface="微软雅黑"/>
@@ -8940,7 +9894,7 @@
             <a:avLst/>
           </a:prstGeom>
           <a:solidFill>
-            <a:srgbClr val="F0F4F8"/>
+            <a:srgbClr val="F7F4EE"/>
           </a:solidFill>
           <a:ln>
             <a:noFill/>
@@ -8980,7 +9934,7 @@
             <a:r>
               <a:rPr sz="1050" b="0">
                 <a:solidFill>
-                  <a:srgbClr val="0A1E3D"/>
+                  <a:srgbClr val="080A08"/>
                 </a:solidFill>
                 <a:latin typeface="微软雅黑"/>
                 <a:ea typeface="微软雅黑"/>
@@ -9006,7 +9960,7 @@
             <a:avLst/>
           </a:prstGeom>
           <a:solidFill>
-            <a:srgbClr val="F0F4F8"/>
+            <a:srgbClr val="F7F4EE"/>
           </a:solidFill>
           <a:ln>
             <a:noFill/>
@@ -9046,7 +10000,7 @@
             <a:r>
               <a:rPr sz="1050" b="0">
                 <a:solidFill>
-                  <a:srgbClr val="0A1E3D"/>
+                  <a:srgbClr val="080A08"/>
                 </a:solidFill>
                 <a:latin typeface="微软雅黑"/>
                 <a:ea typeface="微软雅黑"/>
@@ -9083,7 +10037,7 @@
             <a:r>
               <a:rPr sz="1150" b="0">
                 <a:solidFill>
-                  <a:srgbClr val="A33A2A"/>
+                  <a:srgbClr val="9E4A2B"/>
                 </a:solidFill>
                 <a:latin typeface="微软雅黑"/>
                 <a:ea typeface="微软雅黑"/>
@@ -9117,17 +10071,76 @@
           </a:bodyPr>
           <a:lstStyle/>
           <a:p>
-            <a:pPr algn="r"/>
-            <a:r>
-              <a:rPr sz="1000" b="0">
-                <a:solidFill>
-                  <a:srgbClr val="6B7B8D"/>
-                </a:solidFill>
-                <a:latin typeface="微软雅黑"/>
-                <a:ea typeface="微软雅黑"/>
-                <a:cs typeface="微软雅黑"/>
-              </a:rPr>
-              <a:t>5 / 12</a:t>
+            <a:r>
+              <a:t>5 / 13</a:t>
+            </a:r>
+          </a:p>
+        </p:txBody>
+      </p:sp>
+      <p:sp>
+        <p:nvSpPr>
+          <p:cNvPr id="28" name="TextBox 27"/>
+          <p:cNvSpPr txBox="1"/>
+          <p:nvPr/>
+        </p:nvSpPr>
+        <p:spPr>
+          <a:xfrm>
+            <a:off x="594359" y="1417320"/>
+            <a:ext cx="6400800" cy="4297679"/>
+          </a:xfrm>
+          <a:prstGeom prst="rect">
+            <a:avLst/>
+          </a:prstGeom>
+          <a:noFill/>
+          <a:ln w="15875">
+            <a:solidFill>
+              <a:srgbClr val="9B7247"/>
+            </a:solidFill>
+          </a:ln>
+        </p:spPr>
+        <p:txBody>
+          <a:bodyPr wrap="none">
+            <a:spAutoFit/>
+          </a:bodyPr>
+          <a:lstStyle/>
+          <a:p/>
+        </p:txBody>
+      </p:sp>
+      <p:sp>
+        <p:nvSpPr>
+          <p:cNvPr id="29" name="TextBox 28"/>
+          <p:cNvSpPr txBox="1"/>
+          <p:nvPr/>
+        </p:nvSpPr>
+        <p:spPr>
+          <a:xfrm>
+            <a:off x="640080" y="5714999"/>
+            <a:ext cx="6309360" cy="256032"/>
+          </a:xfrm>
+          <a:prstGeom prst="rect">
+            <a:avLst/>
+          </a:prstGeom>
+          <a:solidFill>
+            <a:srgbClr val="E6DFD4"/>
+          </a:solidFill>
+          <a:ln>
+            <a:noFill/>
+          </a:ln>
+        </p:spPr>
+        <p:txBody>
+          <a:bodyPr wrap="none" lIns="73152" tIns="18288">
+            <a:spAutoFit/>
+          </a:bodyPr>
+          <a:lstStyle/>
+          <a:p>
+            <a:r>
+              <a:rPr sz="850">
+                <a:solidFill>
+                  <a:srgbClr val="6E675F"/>
+                </a:solidFill>
+                <a:latin typeface="微软雅黑"/>
+              </a:rPr>
+              <a:t>生产通路实拍 · 平台原生界面（拒答证据）· 未修饰</a:t>
             </a:r>
           </a:p>
         </p:txBody>
@@ -9143,6 +10156,14 @@
 <file path=ppt/slides/slide6.xml><?xml version="1.0" encoding="utf-8"?>
 <p:sld xmlns:a="http://schemas.openxmlformats.org/drawingml/2006/main" xmlns:p="http://schemas.openxmlformats.org/presentationml/2006/main" xmlns:r="http://schemas.openxmlformats.org/officeDocument/2006/relationships">
   <p:cSld>
+    <p:bg>
+      <p:bgPr>
+        <a:solidFill>
+          <a:srgbClr val="EFEDE9"/>
+        </a:solidFill>
+        <a:effectLst/>
+      </p:bgPr>
+    </p:bg>
     <p:spTree>
       <p:nvGrpSpPr>
         <p:cNvPr id="1" name=""/>
@@ -9176,7 +10197,7 @@
             <a:r>
               <a:rPr sz="2800" b="1">
                 <a:solidFill>
-                  <a:srgbClr val="0A1E3D"/>
+                  <a:srgbClr val="080A08"/>
                 </a:solidFill>
                 <a:latin typeface="微软雅黑"/>
                 <a:ea typeface="微软雅黑"/>
@@ -9213,7 +10234,7 @@
             <a:r>
               <a:rPr sz="1000" b="0">
                 <a:solidFill>
-                  <a:srgbClr val="6B7B8D"/>
+                  <a:srgbClr val="6E675F"/>
                 </a:solidFill>
                 <a:latin typeface="微软雅黑"/>
                 <a:ea typeface="微软雅黑"/>
@@ -9239,7 +10260,7 @@
             <a:avLst/>
           </a:prstGeom>
           <a:solidFill>
-            <a:srgbClr val="DEE5EF"/>
+            <a:srgbClr val="E6DFD4"/>
           </a:solidFill>
           <a:ln>
             <a:noFill/>
@@ -9268,7 +10289,7 @@
             <a:avLst/>
           </a:prstGeom>
           <a:solidFill>
-            <a:srgbClr val="1E5AB8"/>
+            <a:srgbClr val="9B7247"/>
           </a:solidFill>
           <a:ln>
             <a:noFill/>
@@ -9334,7 +10355,7 @@
             <a:avLst/>
           </a:prstGeom>
           <a:solidFill>
-            <a:srgbClr val="1E5AB8"/>
+            <a:srgbClr val="9B7247"/>
           </a:solidFill>
           <a:ln>
             <a:noFill/>
@@ -9400,7 +10421,7 @@
             <a:avLst/>
           </a:prstGeom>
           <a:solidFill>
-            <a:srgbClr val="1E5AB8"/>
+            <a:srgbClr val="9B7247"/>
           </a:solidFill>
           <a:ln>
             <a:noFill/>
@@ -9466,7 +10487,7 @@
             <a:avLst/>
           </a:prstGeom>
           <a:solidFill>
-            <a:srgbClr val="1E5AB8"/>
+            <a:srgbClr val="9B7247"/>
           </a:solidFill>
           <a:ln>
             <a:noFill/>
@@ -9532,7 +10553,7 @@
             <a:avLst/>
           </a:prstGeom>
           <a:solidFill>
-            <a:srgbClr val="F0F4F8"/>
+            <a:srgbClr val="F7F4EE"/>
           </a:solidFill>
           <a:ln>
             <a:noFill/>
@@ -9572,7 +10593,7 @@
             <a:r>
               <a:rPr sz="1000" b="0">
                 <a:solidFill>
-                  <a:srgbClr val="0A1E3D"/>
+                  <a:srgbClr val="080A08"/>
                 </a:solidFill>
                 <a:latin typeface="微软雅黑"/>
                 <a:ea typeface="微软雅黑"/>
@@ -9598,7 +10619,7 @@
             <a:avLst/>
           </a:prstGeom>
           <a:solidFill>
-            <a:srgbClr val="F0F4F8"/>
+            <a:srgbClr val="F7F4EE"/>
           </a:solidFill>
           <a:ln>
             <a:noFill/>
@@ -9638,7 +10659,7 @@
             <a:r>
               <a:rPr sz="1000" b="0">
                 <a:solidFill>
-                  <a:srgbClr val="0A1E3D"/>
+                  <a:srgbClr val="080A08"/>
                 </a:solidFill>
                 <a:latin typeface="微软雅黑"/>
                 <a:ea typeface="微软雅黑"/>
@@ -9664,7 +10685,7 @@
             <a:avLst/>
           </a:prstGeom>
           <a:solidFill>
-            <a:srgbClr val="F0F4F8"/>
+            <a:srgbClr val="F7F4EE"/>
           </a:solidFill>
           <a:ln>
             <a:noFill/>
@@ -9704,7 +10725,7 @@
             <a:r>
               <a:rPr sz="1000" b="0">
                 <a:solidFill>
-                  <a:srgbClr val="0A1E3D"/>
+                  <a:srgbClr val="080A08"/>
                 </a:solidFill>
                 <a:latin typeface="微软雅黑"/>
                 <a:ea typeface="微软雅黑"/>
@@ -9730,7 +10751,7 @@
             <a:avLst/>
           </a:prstGeom>
           <a:solidFill>
-            <a:srgbClr val="F0F4F8"/>
+            <a:srgbClr val="F7F4EE"/>
           </a:solidFill>
           <a:ln>
             <a:noFill/>
@@ -9770,7 +10791,7 @@
             <a:r>
               <a:rPr sz="1000" b="0">
                 <a:solidFill>
-                  <a:srgbClr val="0A1E3D"/>
+                  <a:srgbClr val="080A08"/>
                 </a:solidFill>
                 <a:latin typeface="微软雅黑"/>
                 <a:ea typeface="微软雅黑"/>
@@ -9807,7 +10828,7 @@
             <a:r>
               <a:rPr sz="1000" b="0">
                 <a:solidFill>
-                  <a:srgbClr val="0A1E3D"/>
+                  <a:srgbClr val="080A08"/>
                 </a:solidFill>
                 <a:latin typeface="微软雅黑"/>
                 <a:ea typeface="微软雅黑"/>
@@ -9844,7 +10865,7 @@
             <a:r>
               <a:rPr sz="1000" b="0">
                 <a:solidFill>
-                  <a:srgbClr val="0A1E3D"/>
+                  <a:srgbClr val="080A08"/>
                 </a:solidFill>
                 <a:latin typeface="微软雅黑"/>
                 <a:ea typeface="微软雅黑"/>
@@ -9881,7 +10902,7 @@
             <a:r>
               <a:rPr sz="1000" b="0">
                 <a:solidFill>
-                  <a:srgbClr val="0A1E3D"/>
+                  <a:srgbClr val="080A08"/>
                 </a:solidFill>
                 <a:latin typeface="微软雅黑"/>
                 <a:ea typeface="微软雅黑"/>
@@ -9918,7 +10939,7 @@
             <a:r>
               <a:rPr sz="1000" b="0">
                 <a:solidFill>
-                  <a:srgbClr val="0A1E3D"/>
+                  <a:srgbClr val="080A08"/>
                 </a:solidFill>
                 <a:latin typeface="微软雅黑"/>
                 <a:ea typeface="微软雅黑"/>
@@ -9944,7 +10965,7 @@
             <a:avLst/>
           </a:prstGeom>
           <a:solidFill>
-            <a:srgbClr val="F0F4F8"/>
+            <a:srgbClr val="F7F4EE"/>
           </a:solidFill>
           <a:ln>
             <a:noFill/>
@@ -9984,7 +11005,7 @@
             <a:r>
               <a:rPr sz="1000" b="0">
                 <a:solidFill>
-                  <a:srgbClr val="0A1E3D"/>
+                  <a:srgbClr val="080A08"/>
                 </a:solidFill>
                 <a:latin typeface="微软雅黑"/>
                 <a:ea typeface="微软雅黑"/>
@@ -10010,7 +11031,7 @@
             <a:avLst/>
           </a:prstGeom>
           <a:solidFill>
-            <a:srgbClr val="F0F4F8"/>
+            <a:srgbClr val="F7F4EE"/>
           </a:solidFill>
           <a:ln>
             <a:noFill/>
@@ -10050,7 +11071,7 @@
             <a:r>
               <a:rPr sz="1000" b="0">
                 <a:solidFill>
-                  <a:srgbClr val="0A1E3D"/>
+                  <a:srgbClr val="080A08"/>
                 </a:solidFill>
                 <a:latin typeface="微软雅黑"/>
                 <a:ea typeface="微软雅黑"/>
@@ -10076,7 +11097,7 @@
             <a:avLst/>
           </a:prstGeom>
           <a:solidFill>
-            <a:srgbClr val="F0F4F8"/>
+            <a:srgbClr val="F7F4EE"/>
           </a:solidFill>
           <a:ln>
             <a:noFill/>
@@ -10116,7 +11137,7 @@
             <a:r>
               <a:rPr sz="1000" b="0">
                 <a:solidFill>
-                  <a:srgbClr val="0A1E3D"/>
+                  <a:srgbClr val="080A08"/>
                 </a:solidFill>
                 <a:latin typeface="微软雅黑"/>
                 <a:ea typeface="微软雅黑"/>
@@ -10142,7 +11163,7 @@
             <a:avLst/>
           </a:prstGeom>
           <a:solidFill>
-            <a:srgbClr val="F0F4F8"/>
+            <a:srgbClr val="F7F4EE"/>
           </a:solidFill>
           <a:ln>
             <a:noFill/>
@@ -10182,7 +11203,7 @@
             <a:r>
               <a:rPr sz="1000" b="0">
                 <a:solidFill>
-                  <a:srgbClr val="0A1E3D"/>
+                  <a:srgbClr val="080A08"/>
                 </a:solidFill>
                 <a:latin typeface="微软雅黑"/>
                 <a:ea typeface="微软雅黑"/>
@@ -10219,7 +11240,7 @@
             <a:r>
               <a:rPr sz="1000" b="0">
                 <a:solidFill>
-                  <a:srgbClr val="0A1E3D"/>
+                  <a:srgbClr val="080A08"/>
                 </a:solidFill>
                 <a:latin typeface="微软雅黑"/>
                 <a:ea typeface="微软雅黑"/>
@@ -10256,7 +11277,7 @@
             <a:r>
               <a:rPr sz="1000" b="0">
                 <a:solidFill>
-                  <a:srgbClr val="0A1E3D"/>
+                  <a:srgbClr val="080A08"/>
                 </a:solidFill>
                 <a:latin typeface="微软雅黑"/>
                 <a:ea typeface="微软雅黑"/>
@@ -10293,7 +11314,7 @@
             <a:r>
               <a:rPr sz="1000" b="0">
                 <a:solidFill>
-                  <a:srgbClr val="0A1E3D"/>
+                  <a:srgbClr val="080A08"/>
                 </a:solidFill>
                 <a:latin typeface="微软雅黑"/>
                 <a:ea typeface="微软雅黑"/>
@@ -10330,7 +11351,7 @@
             <a:r>
               <a:rPr sz="1000" b="0">
                 <a:solidFill>
-                  <a:srgbClr val="0A1E3D"/>
+                  <a:srgbClr val="080A08"/>
                 </a:solidFill>
                 <a:latin typeface="微软雅黑"/>
                 <a:ea typeface="微软雅黑"/>
@@ -10367,7 +11388,7 @@
             <a:r>
               <a:rPr sz="1200" b="0">
                 <a:solidFill>
-                  <a:srgbClr val="0A1E3D"/>
+                  <a:srgbClr val="080A08"/>
                 </a:solidFill>
                 <a:latin typeface="微软雅黑"/>
                 <a:ea typeface="微软雅黑"/>
@@ -10400,17 +11421,8 @@
           </a:bodyPr>
           <a:lstStyle/>
           <a:p>
-            <a:pPr algn="r"/>
-            <a:r>
-              <a:rPr sz="1000" b="0">
-                <a:solidFill>
-                  <a:srgbClr val="6B7B8D"/>
-                </a:solidFill>
-                <a:latin typeface="微软雅黑"/>
-                <a:ea typeface="微软雅黑"/>
-                <a:cs typeface="微软雅黑"/>
-              </a:rPr>
-              <a:t>6 / 12</a:t>
+            <a:r>
+              <a:t>6 / 13</a:t>
             </a:r>
           </a:p>
         </p:txBody>
@@ -10426,6 +11438,14 @@
 <file path=ppt/slides/slide7.xml><?xml version="1.0" encoding="utf-8"?>
 <p:sld xmlns:a="http://schemas.openxmlformats.org/drawingml/2006/main" xmlns:p="http://schemas.openxmlformats.org/presentationml/2006/main" xmlns:r="http://schemas.openxmlformats.org/officeDocument/2006/relationships">
   <p:cSld>
+    <p:bg>
+      <p:bgPr>
+        <a:solidFill>
+          <a:srgbClr val="EFEDE9"/>
+        </a:solidFill>
+        <a:effectLst/>
+      </p:bgPr>
+    </p:bg>
     <p:spTree>
       <p:nvGrpSpPr>
         <p:cNvPr id="1" name=""/>
@@ -10459,7 +11479,7 @@
             <a:r>
               <a:rPr sz="2800" b="1">
                 <a:solidFill>
-                  <a:srgbClr val="0A1E3D"/>
+                  <a:srgbClr val="080A08"/>
                 </a:solidFill>
                 <a:latin typeface="微软雅黑"/>
                 <a:ea typeface="微软雅黑"/>
@@ -10496,7 +11516,7 @@
             <a:r>
               <a:rPr sz="1000" b="0">
                 <a:solidFill>
-                  <a:srgbClr val="6B7B8D"/>
+                  <a:srgbClr val="6E675F"/>
                 </a:solidFill>
                 <a:latin typeface="微软雅黑"/>
                 <a:ea typeface="微软雅黑"/>
@@ -10522,7 +11542,7 @@
             <a:avLst/>
           </a:prstGeom>
           <a:solidFill>
-            <a:srgbClr val="DEE5EF"/>
+            <a:srgbClr val="E6DFD4"/>
           </a:solidFill>
           <a:ln>
             <a:noFill/>
@@ -10551,7 +11571,7 @@
             <a:avLst/>
           </a:prstGeom>
           <a:solidFill>
-            <a:srgbClr val="F0F4F8"/>
+            <a:srgbClr val="F7F4EE"/>
           </a:solidFill>
           <a:ln>
             <a:noFill/>
@@ -10580,7 +11600,7 @@
             <a:avLst/>
           </a:prstGeom>
           <a:solidFill>
-            <a:srgbClr val="1E5AB8"/>
+            <a:srgbClr val="9B7247"/>
           </a:solidFill>
           <a:ln>
             <a:noFill/>
@@ -10620,7 +11640,7 @@
             <a:r>
               <a:rPr sz="1700" b="1">
                 <a:solidFill>
-                  <a:srgbClr val="0A1E3D"/>
+                  <a:srgbClr val="080A08"/>
                 </a:solidFill>
                 <a:latin typeface="微软雅黑"/>
                 <a:ea typeface="微软雅黑"/>
@@ -10657,7 +11677,7 @@
             <a:r>
               <a:rPr sz="1150" b="0">
                 <a:solidFill>
-                  <a:srgbClr val="0A1E3D"/>
+                  <a:srgbClr val="080A08"/>
                 </a:solidFill>
                 <a:latin typeface="微软雅黑"/>
                 <a:ea typeface="微软雅黑"/>
@@ -10695,7 +11715,7 @@
             <a:r>
               <a:rPr sz="1150" b="0">
                 <a:solidFill>
-                  <a:srgbClr val="C77D0A"/>
+                  <a:srgbClr val="8A6234"/>
                 </a:solidFill>
                 <a:latin typeface="微软雅黑"/>
                 <a:ea typeface="微软雅黑"/>
@@ -10722,7 +11742,7 @@
             <a:avLst/>
           </a:prstGeom>
           <a:solidFill>
-            <a:srgbClr val="0096C7"/>
+            <a:srgbClr val="C5A16B"/>
           </a:solidFill>
           <a:ln>
             <a:noFill/>
@@ -10751,7 +11771,7 @@
             <a:avLst/>
           </a:prstGeom>
           <a:solidFill>
-            <a:srgbClr val="F0F4F8"/>
+            <a:srgbClr val="F7F4EE"/>
           </a:solidFill>
           <a:ln>
             <a:noFill/>
@@ -10780,7 +11800,7 @@
             <a:avLst/>
           </a:prstGeom>
           <a:solidFill>
-            <a:srgbClr val="1E5AB8"/>
+            <a:srgbClr val="9B7247"/>
           </a:solidFill>
           <a:ln>
             <a:noFill/>
@@ -10820,7 +11840,7 @@
             <a:r>
               <a:rPr sz="1700" b="1">
                 <a:solidFill>
-                  <a:srgbClr val="0A1E3D"/>
+                  <a:srgbClr val="080A08"/>
                 </a:solidFill>
                 <a:latin typeface="微软雅黑"/>
                 <a:ea typeface="微软雅黑"/>
@@ -10857,7 +11877,7 @@
             <a:r>
               <a:rPr sz="1150" b="0">
                 <a:solidFill>
-                  <a:srgbClr val="0A1E3D"/>
+                  <a:srgbClr val="080A08"/>
                 </a:solidFill>
                 <a:latin typeface="微软雅黑"/>
                 <a:ea typeface="微软雅黑"/>
@@ -10895,7 +11915,7 @@
             <a:r>
               <a:rPr sz="1150" b="0">
                 <a:solidFill>
-                  <a:srgbClr val="C77D0A"/>
+                  <a:srgbClr val="8A6234"/>
                 </a:solidFill>
                 <a:latin typeface="微软雅黑"/>
                 <a:ea typeface="微软雅黑"/>
@@ -10922,7 +11942,7 @@
             <a:avLst/>
           </a:prstGeom>
           <a:solidFill>
-            <a:srgbClr val="0096C7"/>
+            <a:srgbClr val="C5A16B"/>
           </a:solidFill>
           <a:ln>
             <a:noFill/>
@@ -10951,7 +11971,7 @@
             <a:avLst/>
           </a:prstGeom>
           <a:solidFill>
-            <a:srgbClr val="F0F4F8"/>
+            <a:srgbClr val="F7F4EE"/>
           </a:solidFill>
           <a:ln>
             <a:noFill/>
@@ -10980,7 +12000,7 @@
             <a:avLst/>
           </a:prstGeom>
           <a:solidFill>
-            <a:srgbClr val="1E5AB8"/>
+            <a:srgbClr val="9B7247"/>
           </a:solidFill>
           <a:ln>
             <a:noFill/>
@@ -11020,7 +12040,7 @@
             <a:r>
               <a:rPr sz="1700" b="1">
                 <a:solidFill>
-                  <a:srgbClr val="0A1E3D"/>
+                  <a:srgbClr val="080A08"/>
                 </a:solidFill>
                 <a:latin typeface="微软雅黑"/>
                 <a:ea typeface="微软雅黑"/>
@@ -11057,7 +12077,7 @@
             <a:r>
               <a:rPr sz="1150" b="0">
                 <a:solidFill>
-                  <a:srgbClr val="0A1E3D"/>
+                  <a:srgbClr val="080A08"/>
                 </a:solidFill>
                 <a:latin typeface="微软雅黑"/>
                 <a:ea typeface="微软雅黑"/>
@@ -11095,7 +12115,7 @@
             <a:r>
               <a:rPr sz="1150" b="0">
                 <a:solidFill>
-                  <a:srgbClr val="C77D0A"/>
+                  <a:srgbClr val="8A6234"/>
                 </a:solidFill>
                 <a:latin typeface="微软雅黑"/>
                 <a:ea typeface="微软雅黑"/>
@@ -11133,7 +12153,7 @@
             <a:r>
               <a:rPr sz="1200" b="0">
                 <a:solidFill>
-                  <a:srgbClr val="0A1E3D"/>
+                  <a:srgbClr val="080A08"/>
                 </a:solidFill>
                 <a:latin typeface="微软雅黑"/>
                 <a:ea typeface="微软雅黑"/>
@@ -11166,17 +12186,8 @@
           </a:bodyPr>
           <a:lstStyle/>
           <a:p>
-            <a:pPr algn="r"/>
-            <a:r>
-              <a:rPr sz="1000" b="0">
-                <a:solidFill>
-                  <a:srgbClr val="6B7B8D"/>
-                </a:solidFill>
-                <a:latin typeface="微软雅黑"/>
-                <a:ea typeface="微软雅黑"/>
-                <a:cs typeface="微软雅黑"/>
-              </a:rPr>
-              <a:t>7 / 12</a:t>
+            <a:r>
+              <a:t>7 / 13</a:t>
             </a:r>
           </a:p>
         </p:txBody>
@@ -11192,6 +12203,14 @@
 <file path=ppt/slides/slide8.xml><?xml version="1.0" encoding="utf-8"?>
 <p:sld xmlns:a="http://schemas.openxmlformats.org/drawingml/2006/main" xmlns:p="http://schemas.openxmlformats.org/presentationml/2006/main" xmlns:r="http://schemas.openxmlformats.org/officeDocument/2006/relationships">
   <p:cSld>
+    <p:bg>
+      <p:bgPr>
+        <a:solidFill>
+          <a:srgbClr val="EFEDE9"/>
+        </a:solidFill>
+        <a:effectLst/>
+      </p:bgPr>
+    </p:bg>
     <p:spTree>
       <p:nvGrpSpPr>
         <p:cNvPr id="1" name=""/>
@@ -11225,7 +12244,7 @@
             <a:r>
               <a:rPr sz="2800" b="1">
                 <a:solidFill>
-                  <a:srgbClr val="0A1E3D"/>
+                  <a:srgbClr val="080A08"/>
                 </a:solidFill>
                 <a:latin typeface="微软雅黑"/>
                 <a:ea typeface="微软雅黑"/>
@@ -11262,7 +12281,7 @@
             <a:r>
               <a:rPr sz="1000" b="0">
                 <a:solidFill>
-                  <a:srgbClr val="6B7B8D"/>
+                  <a:srgbClr val="6E675F"/>
                 </a:solidFill>
                 <a:latin typeface="微软雅黑"/>
                 <a:ea typeface="微软雅黑"/>
@@ -11288,7 +12307,7 @@
             <a:avLst/>
           </a:prstGeom>
           <a:solidFill>
-            <a:srgbClr val="DEE5EF"/>
+            <a:srgbClr val="E6DFD4"/>
           </a:solidFill>
           <a:ln>
             <a:noFill/>
@@ -11328,7 +12347,7 @@
             <a:r>
               <a:rPr sz="3400" b="1">
                 <a:solidFill>
-                  <a:srgbClr val="C77D0A"/>
+                  <a:srgbClr val="8A6234"/>
                 </a:solidFill>
                 <a:latin typeface="微软雅黑"/>
                 <a:ea typeface="微软雅黑"/>
@@ -11365,7 +12384,7 @@
             <a:r>
               <a:rPr sz="1300" b="0">
                 <a:solidFill>
-                  <a:srgbClr val="6B7B8D"/>
+                  <a:srgbClr val="6E675F"/>
                 </a:solidFill>
                 <a:latin typeface="微软雅黑"/>
                 <a:ea typeface="微软雅黑"/>
@@ -11402,7 +12421,7 @@
             <a:r>
               <a:rPr sz="1150" b="0">
                 <a:solidFill>
-                  <a:srgbClr val="0A1E3D"/>
+                  <a:srgbClr val="080A08"/>
                 </a:solidFill>
                 <a:latin typeface="微软雅黑"/>
                 <a:ea typeface="微软雅黑"/>
@@ -11439,7 +12458,7 @@
             <a:r>
               <a:rPr sz="3400" b="1">
                 <a:solidFill>
-                  <a:srgbClr val="C77D0A"/>
+                  <a:srgbClr val="8A6234"/>
                 </a:solidFill>
                 <a:latin typeface="微软雅黑"/>
                 <a:ea typeface="微软雅黑"/>
@@ -11476,7 +12495,7 @@
             <a:r>
               <a:rPr sz="1300" b="0">
                 <a:solidFill>
-                  <a:srgbClr val="6B7B8D"/>
+                  <a:srgbClr val="6E675F"/>
                 </a:solidFill>
                 <a:latin typeface="微软雅黑"/>
                 <a:ea typeface="微软雅黑"/>
@@ -11513,7 +12532,7 @@
             <a:r>
               <a:rPr sz="1150" b="0">
                 <a:solidFill>
-                  <a:srgbClr val="0A1E3D"/>
+                  <a:srgbClr val="080A08"/>
                 </a:solidFill>
                 <a:latin typeface="微软雅黑"/>
                 <a:ea typeface="微软雅黑"/>
@@ -11550,7 +12569,7 @@
             <a:r>
               <a:rPr sz="3400" b="1">
                 <a:solidFill>
-                  <a:srgbClr val="C77D0A"/>
+                  <a:srgbClr val="8A6234"/>
                 </a:solidFill>
                 <a:latin typeface="微软雅黑"/>
                 <a:ea typeface="微软雅黑"/>
@@ -11587,7 +12606,7 @@
             <a:r>
               <a:rPr sz="1300" b="0">
                 <a:solidFill>
-                  <a:srgbClr val="6B7B8D"/>
+                  <a:srgbClr val="6E675F"/>
                 </a:solidFill>
                 <a:latin typeface="微软雅黑"/>
                 <a:ea typeface="微软雅黑"/>
@@ -11624,7 +12643,7 @@
             <a:r>
               <a:rPr sz="1150" b="0">
                 <a:solidFill>
-                  <a:srgbClr val="0A1E3D"/>
+                  <a:srgbClr val="080A08"/>
                 </a:solidFill>
                 <a:latin typeface="微软雅黑"/>
                 <a:ea typeface="微软雅黑"/>
@@ -11661,7 +12680,7 @@
             <a:r>
               <a:rPr sz="1300" b="1">
                 <a:solidFill>
-                  <a:srgbClr val="0A1E3D"/>
+                  <a:srgbClr val="080A08"/>
                 </a:solidFill>
                 <a:latin typeface="微软雅黑"/>
                 <a:ea typeface="微软雅黑"/>
@@ -11701,7 +12720,7 @@
               <a:avLst/>
             </a:prstGeom>
             <a:solidFill>
-              <a:srgbClr val="F0F4F8"/>
+              <a:srgbClr val="F7F4EE"/>
             </a:solidFill>
             <a:ln>
               <a:noFill/>
@@ -11730,7 +12749,7 @@
               <a:avLst/>
             </a:prstGeom>
             <a:solidFill>
-              <a:srgbClr val="1E5AB8"/>
+              <a:srgbClr val="9B7247"/>
             </a:solidFill>
             <a:ln>
               <a:noFill/>
@@ -11770,7 +12789,7 @@
               <a:r>
                 <a:rPr sz="1000" b="0">
                   <a:solidFill>
-                    <a:srgbClr val="0A1E3D"/>
+                    <a:srgbClr val="080A08"/>
                   </a:solidFill>
                   <a:latin typeface="微软雅黑"/>
                   <a:ea typeface="微软雅黑"/>
@@ -11806,7 +12825,7 @@
               <a:r>
                 <a:rPr sz="1000" b="1">
                   <a:solidFill>
-                    <a:srgbClr val="0A1E3D"/>
+                    <a:srgbClr val="080A08"/>
                   </a:solidFill>
                   <a:latin typeface="微软雅黑"/>
                   <a:ea typeface="微软雅黑"/>
@@ -11832,7 +12851,7 @@
               <a:avLst/>
             </a:prstGeom>
             <a:solidFill>
-              <a:srgbClr val="F0F4F8"/>
+              <a:srgbClr val="F7F4EE"/>
             </a:solidFill>
             <a:ln>
               <a:noFill/>
@@ -11861,7 +12880,7 @@
               <a:avLst/>
             </a:prstGeom>
             <a:solidFill>
-              <a:srgbClr val="0096C7"/>
+              <a:srgbClr val="C5A16B"/>
             </a:solidFill>
             <a:ln>
               <a:noFill/>
@@ -11901,7 +12920,7 @@
               <a:r>
                 <a:rPr sz="1000" b="0">
                   <a:solidFill>
-                    <a:srgbClr val="0A1E3D"/>
+                    <a:srgbClr val="080A08"/>
                   </a:solidFill>
                   <a:latin typeface="微软雅黑"/>
                   <a:ea typeface="微软雅黑"/>
@@ -11937,7 +12956,7 @@
               <a:r>
                 <a:rPr sz="1000" b="1">
                   <a:solidFill>
-                    <a:srgbClr val="0A1E3D"/>
+                    <a:srgbClr val="080A08"/>
                   </a:solidFill>
                   <a:latin typeface="微软雅黑"/>
                   <a:ea typeface="微软雅黑"/>
@@ -11963,7 +12982,7 @@
               <a:avLst/>
             </a:prstGeom>
             <a:solidFill>
-              <a:srgbClr val="F0F4F8"/>
+              <a:srgbClr val="F7F4EE"/>
             </a:solidFill>
             <a:ln>
               <a:noFill/>
@@ -11992,7 +13011,7 @@
               <a:avLst/>
             </a:prstGeom>
             <a:solidFill>
-              <a:srgbClr val="6B7B8D"/>
+              <a:srgbClr val="6E675F"/>
             </a:solidFill>
             <a:ln>
               <a:noFill/>
@@ -12032,7 +13051,7 @@
               <a:r>
                 <a:rPr sz="1000" b="0">
                   <a:solidFill>
-                    <a:srgbClr val="0A1E3D"/>
+                    <a:srgbClr val="080A08"/>
                   </a:solidFill>
                   <a:latin typeface="微软雅黑"/>
                   <a:ea typeface="微软雅黑"/>
@@ -12068,7 +13087,7 @@
               <a:r>
                 <a:rPr sz="1000" b="1">
                   <a:solidFill>
-                    <a:srgbClr val="0A1E3D"/>
+                    <a:srgbClr val="080A08"/>
                   </a:solidFill>
                   <a:latin typeface="微软雅黑"/>
                   <a:ea typeface="微软雅黑"/>
@@ -12094,7 +13113,7 @@
               <a:avLst/>
             </a:prstGeom>
             <a:solidFill>
-              <a:srgbClr val="F0F4F8"/>
+              <a:srgbClr val="F7F4EE"/>
             </a:solidFill>
             <a:ln>
               <a:noFill/>
@@ -12123,7 +13142,7 @@
               <a:avLst/>
             </a:prstGeom>
             <a:solidFill>
-              <a:srgbClr val="C8E6C9"/>
+              <a:srgbClr val="E8DFCE"/>
             </a:solidFill>
             <a:ln>
               <a:noFill/>
@@ -12163,7 +13182,7 @@
               <a:r>
                 <a:rPr sz="1000" b="0">
                   <a:solidFill>
-                    <a:srgbClr val="0A1E3D"/>
+                    <a:srgbClr val="080A08"/>
                   </a:solidFill>
                   <a:latin typeface="微软雅黑"/>
                   <a:ea typeface="微软雅黑"/>
@@ -12199,7 +13218,7 @@
               <a:r>
                 <a:rPr sz="1000" b="1">
                   <a:solidFill>
-                    <a:srgbClr val="0A1E3D"/>
+                    <a:srgbClr val="080A08"/>
                   </a:solidFill>
                   <a:latin typeface="微软雅黑"/>
                   <a:ea typeface="微软雅黑"/>
@@ -12225,7 +13244,7 @@
               <a:avLst/>
             </a:prstGeom>
             <a:solidFill>
-              <a:srgbClr val="F0F4F8"/>
+              <a:srgbClr val="F7F4EE"/>
             </a:solidFill>
             <a:ln>
               <a:noFill/>
@@ -12254,7 +13273,7 @@
               <a:avLst/>
             </a:prstGeom>
             <a:solidFill>
-              <a:srgbClr val="1E5AB8"/>
+              <a:srgbClr val="9B7247"/>
             </a:solidFill>
             <a:ln>
               <a:noFill/>
@@ -12294,7 +13313,7 @@
               <a:r>
                 <a:rPr sz="1000" b="0">
                   <a:solidFill>
-                    <a:srgbClr val="0A1E3D"/>
+                    <a:srgbClr val="080A08"/>
                   </a:solidFill>
                   <a:latin typeface="微软雅黑"/>
                   <a:ea typeface="微软雅黑"/>
@@ -12330,7 +13349,7 @@
               <a:r>
                 <a:rPr sz="1000" b="1">
                   <a:solidFill>
-                    <a:srgbClr val="0A1E3D"/>
+                    <a:srgbClr val="080A08"/>
                   </a:solidFill>
                   <a:latin typeface="微软雅黑"/>
                   <a:ea typeface="微软雅黑"/>
@@ -12368,7 +13387,7 @@
             <a:r>
               <a:rPr sz="1150" b="0">
                 <a:solidFill>
-                  <a:srgbClr val="0A1E3D"/>
+                  <a:srgbClr val="080A08"/>
                 </a:solidFill>
                 <a:latin typeface="微软雅黑"/>
                 <a:ea typeface="微软雅黑"/>
@@ -12404,17 +13423,8 @@
           </a:bodyPr>
           <a:lstStyle/>
           <a:p>
-            <a:pPr algn="r"/>
-            <a:r>
-              <a:rPr sz="1000" b="0">
-                <a:solidFill>
-                  <a:srgbClr val="6B7B8D"/>
-                </a:solidFill>
-                <a:latin typeface="微软雅黑"/>
-                <a:ea typeface="微软雅黑"/>
-                <a:cs typeface="微软雅黑"/>
-              </a:rPr>
-              <a:t>8 / 12</a:t>
+            <a:r>
+              <a:t>8 / 13</a:t>
             </a:r>
           </a:p>
         </p:txBody>
@@ -12430,6 +13440,14 @@
 <file path=ppt/slides/slide9.xml><?xml version="1.0" encoding="utf-8"?>
 <p:sld xmlns:a="http://schemas.openxmlformats.org/drawingml/2006/main" xmlns:p="http://schemas.openxmlformats.org/presentationml/2006/main" xmlns:r="http://schemas.openxmlformats.org/officeDocument/2006/relationships">
   <p:cSld>
+    <p:bg>
+      <p:bgPr>
+        <a:solidFill>
+          <a:srgbClr val="EFEDE9"/>
+        </a:solidFill>
+        <a:effectLst/>
+      </p:bgPr>
+    </p:bg>
     <p:spTree>
       <p:nvGrpSpPr>
         <p:cNvPr id="1" name=""/>
@@ -12463,7 +13481,7 @@
             <a:r>
               <a:rPr sz="2800" b="1">
                 <a:solidFill>
-                  <a:srgbClr val="0A1E3D"/>
+                  <a:srgbClr val="080A08"/>
                 </a:solidFill>
                 <a:latin typeface="微软雅黑"/>
                 <a:ea typeface="微软雅黑"/>
@@ -12500,7 +13518,7 @@
             <a:r>
               <a:rPr sz="1000" b="0">
                 <a:solidFill>
-                  <a:srgbClr val="6B7B8D"/>
+                  <a:srgbClr val="6E675F"/>
                 </a:solidFill>
                 <a:latin typeface="微软雅黑"/>
                 <a:ea typeface="微软雅黑"/>
@@ -12526,7 +13544,7 @@
             <a:avLst/>
           </a:prstGeom>
           <a:solidFill>
-            <a:srgbClr val="DEE5EF"/>
+            <a:srgbClr val="E6DFD4"/>
           </a:solidFill>
           <a:ln>
             <a:noFill/>
@@ -12555,7 +13573,7 @@
             <a:avLst/>
           </a:prstGeom>
           <a:solidFill>
-            <a:srgbClr val="1E5AB8"/>
+            <a:srgbClr val="9B7247"/>
           </a:solidFill>
           <a:ln>
             <a:noFill/>
@@ -12658,7 +13676,7 @@
             <a:avLst/>
           </a:prstGeom>
           <a:solidFill>
-            <a:srgbClr val="0096C7"/>
+            <a:srgbClr val="C5A16B"/>
           </a:solidFill>
           <a:ln>
             <a:noFill/>
@@ -12761,7 +13779,7 @@
             <a:avLst/>
           </a:prstGeom>
           <a:solidFill>
-            <a:srgbClr val="1F7A5A"/>
+            <a:srgbClr val="7A6238"/>
           </a:solidFill>
           <a:ln>
             <a:noFill/>
@@ -12864,7 +13882,7 @@
             <a:avLst/>
           </a:prstGeom>
           <a:solidFill>
-            <a:srgbClr val="DEE5EF"/>
+            <a:srgbClr val="E6DFD4"/>
           </a:solidFill>
           <a:ln>
             <a:noFill/>
@@ -12904,7 +13922,7 @@
             <a:r>
               <a:rPr sz="1200" b="0">
                 <a:solidFill>
-                  <a:srgbClr val="0A1E3D"/>
+                  <a:srgbClr val="080A08"/>
                 </a:solidFill>
                 <a:latin typeface="微软雅黑"/>
                 <a:ea typeface="微软雅黑"/>
@@ -12938,17 +13956,8 @@
           </a:bodyPr>
           <a:lstStyle/>
           <a:p>
-            <a:pPr algn="r"/>
-            <a:r>
-              <a:rPr sz="1000" b="0">
-                <a:solidFill>
-                  <a:srgbClr val="6B7B8D"/>
-                </a:solidFill>
-                <a:latin typeface="微软雅黑"/>
-                <a:ea typeface="微软雅黑"/>
-                <a:cs typeface="微软雅黑"/>
-              </a:rPr>
-              <a:t>9 / 12</a:t>
+            <a:r>
+              <a:t>9 / 13</a:t>
             </a:r>
           </a:p>
         </p:txBody>
@@ -12972,34 +13981,34 @@
         <a:sysClr val="window" lastClr="FFFFFF"/>
       </a:lt1>
       <a:dk2>
-        <a:srgbClr val="1F497D"/>
+        <a:srgbClr val="080A08"/>
       </a:dk2>
       <a:lt2>
-        <a:srgbClr val="EEECE1"/>
+        <a:srgbClr val="EFEDE9"/>
       </a:lt2>
       <a:accent1>
-        <a:srgbClr val="4F81BD"/>
+        <a:srgbClr val="9B7247"/>
       </a:accent1>
       <a:accent2>
-        <a:srgbClr val="C0504D"/>
+        <a:srgbClr val="9E4A2B"/>
       </a:accent2>
       <a:accent3>
-        <a:srgbClr val="9BBB59"/>
+        <a:srgbClr val="7A6238"/>
       </a:accent3>
       <a:accent4>
-        <a:srgbClr val="8064A2"/>
+        <a:srgbClr val="8A6234"/>
       </a:accent4>
       <a:accent5>
-        <a:srgbClr val="4BACC6"/>
+        <a:srgbClr val="C5A16B"/>
       </a:accent5>
       <a:accent6>
-        <a:srgbClr val="F79646"/>
+        <a:srgbClr val="9B7247"/>
       </a:accent6>
       <a:hlink>
-        <a:srgbClr val="0000FF"/>
+        <a:srgbClr val="8A6234"/>
       </a:hlink>
       <a:folHlink>
-        <a:srgbClr val="800080"/>
+        <a:srgbClr val="7A6238"/>
       </a:folHlink>
     </a:clrScheme>
     <a:fontScheme name="Office">

--- a/deck/ict-deck.pptx
+++ b/deck/ict-deck.pptx
@@ -7050,80 +7050,6 @@
                           <a:latin typeface="微软雅黑"/>
                         </a:rPr>
                         <a:t>治理技能接入、评测门控对接；LOGO 与版权信息原样保留</a:t>
-                      </a:r>
-                    </a:p>
-                  </a:txBody>
-                  <a:tcPr/>
-                </a:tc>
-              </a:tr>
-              <a:tr h="441960">
-                <a:tc>
-                  <a:txBody>
-                    <a:bodyPr/>
-                    <a:lstStyle/>
-                    <a:p>
-                      <a:r>
-                        <a:rPr sz="950" b="0">
-                          <a:solidFill>
-                            <a:srgbClr val="080A08"/>
-                          </a:solidFill>
-                          <a:latin typeface="微软雅黑"/>
-                        </a:rPr>
-                        <a:t>RhineLabUI</a:t>
-                      </a:r>
-                    </a:p>
-                  </a:txBody>
-                  <a:tcPr/>
-                </a:tc>
-                <a:tc>
-                  <a:txBody>
-                    <a:bodyPr/>
-                    <a:lstStyle/>
-                    <a:p>
-                      <a:r>
-                        <a:rPr sz="950" b="0">
-                          <a:solidFill>
-                            <a:srgbClr val="6E675F"/>
-                          </a:solidFill>
-                          <a:latin typeface="微软雅黑"/>
-                        </a:rPr>
-                        <a:t>MIT</a:t>
-                      </a:r>
-                    </a:p>
-                  </a:txBody>
-                  <a:tcPr/>
-                </a:tc>
-                <a:tc>
-                  <a:txBody>
-                    <a:bodyPr/>
-                    <a:lstStyle/>
-                    <a:p>
-                      <a:r>
-                        <a:rPr sz="950" b="0">
-                          <a:solidFill>
-                            <a:srgbClr val="080A08"/>
-                          </a:solidFill>
-                          <a:latin typeface="微软雅黑"/>
-                        </a:rPr>
-                        <a:t>治理档案馆前端骨架</a:t>
-                      </a:r>
-                    </a:p>
-                  </a:txBody>
-                  <a:tcPr/>
-                </a:tc>
-                <a:tc>
-                  <a:txBody>
-                    <a:bodyPr/>
-                    <a:lstStyle/>
-                    <a:p>
-                      <a:r>
-                        <a:rPr sz="950" b="0">
-                          <a:solidFill>
-                            <a:srgbClr val="080A08"/>
-                          </a:solidFill>
-                          <a:latin typeface="微软雅黑"/>
-                        </a:rPr>
-                        <a:t>全量品牌换血（文字/字画/徽记重绘）、数据源接自有服务、画质策略调整</a:t>
                       </a:r>
                     </a:p>
                   </a:txBody>
